--- a/examples/aurora-synthetic/output/gate-image/aurora-synthetic-gate-image-balanced-fusion.pptx
+++ b/examples/aurora-synthetic/output/gate-image/aurora-synthetic-gate-image-balanced-fusion.pptx
@@ -2,13 +2,13 @@
 <file path=ppt/presentation.xml><?xml version="1.0" encoding="utf-8"?>
 <p:presentation xmlns:p="http://schemas.openxmlformats.org/presentationml/2006/main">
   <p:sldMasterIdLst>
-    <p:sldMasterId xmlns:r="http://schemas.openxmlformats.org/officeDocument/2006/relationships" id="2147483648" r:id="Re57bf861c6bf47ef"/>
+    <p:sldMasterId xmlns:r="http://schemas.openxmlformats.org/officeDocument/2006/relationships" id="2147483648" r:id="R9d90daab81cd4a1e"/>
   </p:sldMasterIdLst>
   <p:notesMasterIdLst>
-    <p:notesMasterId xmlns:r="http://schemas.openxmlformats.org/officeDocument/2006/relationships" r:id="Rbf8f1e30a8a24bfc"/>
+    <p:notesMasterId xmlns:r="http://schemas.openxmlformats.org/officeDocument/2006/relationships" r:id="R47b6f84967964cb6"/>
   </p:notesMasterIdLst>
   <p:sldIdLst>
-    <p:sldId xmlns:r="http://schemas.openxmlformats.org/officeDocument/2006/relationships" id="256" r:id="Rbe62ed06ba064eb5"/>
+    <p:sldId xmlns:r="http://schemas.openxmlformats.org/officeDocument/2006/relationships" id="256" r:id="Rb7919b00c31e407a"/>
   </p:sldIdLst>
   <p:sldSz cx="42805350" cy="30279975"/>
   <p:notesSz cx="6858000" cy="9144000"/>
@@ -530,7 +530,7 @@
   </p:cSld>
   <p:clrMap bg1="lt1" tx1="dk1" bg2="lt2" tx2="dk2" accent1="accent1" accent2="accent2" accent3="accent3" accent4="accent4" accent5="accent5" accent6="accent6" hlink="hlink" folHlink="folHlink"/>
   <p:sldLayoutIdLst>
-    <p:sldLayoutId xmlns:r="http://schemas.openxmlformats.org/officeDocument/2006/relationships" id="2147483649" r:id="Rf6983721046d4771"/>
+    <p:sldLayoutId xmlns:r="http://schemas.openxmlformats.org/officeDocument/2006/relationships" id="2147483649" r:id="R4d5458b7e1364905"/>
   </p:sldLayoutIdLst>
   <p:txStyles>
     <p:titleStyle>
@@ -1078,10 +1078,10 @@
       </p:grpSpPr>
       <p:sp>
         <p:nvSpPr>
-          <p:cNvPr id="88" name="header-band">
-            <a:extLst xmlns:a="http://schemas.openxmlformats.org/drawingml/2006/main">
-              <a:ext uri="{FF2B5EF4-FFF2-40B4-BE49-F238E27FC236}">
-                <a16:creationId xmlns:a16="http://schemas.microsoft.com/office/drawing/2014/main" id="{A7D59D4E-522A-4EC9-B540-4651449893B8}"/>
+          <p:cNvPr id="90" name="header-band">
+            <a:extLst xmlns:a="http://schemas.openxmlformats.org/drawingml/2006/main">
+              <a:ext uri="{FF2B5EF4-FFF2-40B4-BE49-F238E27FC236}">
+                <a16:creationId xmlns:a16="http://schemas.microsoft.com/office/drawing/2014/main" id="{DF9D5E45-2D58-4D07-BA0D-480958C7F292}"/>
               </a:ext>
             </a:extLst>
           </p:cNvPr>
@@ -1114,7 +1114,7 @@
           <p:cNvPr id="2" name="top-accent">
             <a:extLst xmlns:a="http://schemas.openxmlformats.org/drawingml/2006/main">
               <a:ext uri="{FF2B5EF4-FFF2-40B4-BE49-F238E27FC236}">
-                <a16:creationId xmlns:a16="http://schemas.microsoft.com/office/drawing/2014/main" id="{26AF0CE8-66C0-439E-BE77-0C2C0870CBC0}"/>
+                <a16:creationId xmlns:a16="http://schemas.microsoft.com/office/drawing/2014/main" id="{007C83C8-B7D3-4A23-9A9F-21AB1FE20F11}"/>
               </a:ext>
             </a:extLst>
           </p:cNvPr>
@@ -1147,7 +1147,7 @@
           <p:cNvPr id="3" name="poster-title">
             <a:extLst xmlns:a="http://schemas.openxmlformats.org/drawingml/2006/main">
               <a:ext uri="{FF2B5EF4-FFF2-40B4-BE49-F238E27FC236}">
-                <a16:creationId xmlns:a16="http://schemas.microsoft.com/office/drawing/2014/main" id="{40950CE3-31AF-4BE5-9BA0-7D7E303412D5}"/>
+                <a16:creationId xmlns:a16="http://schemas.microsoft.com/office/drawing/2014/main" id="{A26ED6A7-4588-478D-AB5E-F3BDDAA9AD5B}"/>
               </a:ext>
             </a:extLst>
           </p:cNvPr>
@@ -1214,7 +1214,7 @@
           <p:cNvPr id="4" name="authors">
             <a:extLst xmlns:a="http://schemas.openxmlformats.org/drawingml/2006/main">
               <a:ext uri="{FF2B5EF4-FFF2-40B4-BE49-F238E27FC236}">
-                <a16:creationId xmlns:a16="http://schemas.microsoft.com/office/drawing/2014/main" id="{AB036C59-7554-489B-91FD-4218D0658DE7}"/>
+                <a16:creationId xmlns:a16="http://schemas.microsoft.com/office/drawing/2014/main" id="{8C930526-5B79-49B3-9BE0-11ED1AF49BC0}"/>
               </a:ext>
             </a:extLst>
           </p:cNvPr>
@@ -1264,7 +1264,7 @@
           <p:cNvPr id="5" name="affiliations">
             <a:extLst xmlns:a="http://schemas.openxmlformats.org/drawingml/2006/main">
               <a:ext uri="{FF2B5EF4-FFF2-40B4-BE49-F238E27FC236}">
-                <a16:creationId xmlns:a16="http://schemas.microsoft.com/office/drawing/2014/main" id="{CA966FCD-FECA-4E7B-8D54-8516CED12F75}"/>
+                <a16:creationId xmlns:a16="http://schemas.microsoft.com/office/drawing/2014/main" id="{EFAF7ADA-8239-4FBA-AB6C-3F861BE4BC71}"/>
               </a:ext>
             </a:extLst>
           </p:cNvPr>
@@ -1314,7 +1314,7 @@
           <p:cNvPr id="6" name="citation">
             <a:extLst xmlns:a="http://schemas.openxmlformats.org/drawingml/2006/main">
               <a:ext uri="{FF2B5EF4-FFF2-40B4-BE49-F238E27FC236}">
-                <a16:creationId xmlns:a16="http://schemas.microsoft.com/office/drawing/2014/main" id="{F3F92832-3EEC-45B9-89C5-D18C419BBC5B}"/>
+                <a16:creationId xmlns:a16="http://schemas.microsoft.com/office/drawing/2014/main" id="{E3E99537-02A8-4EB1-81F8-543B2755B842}"/>
               </a:ext>
             </a:extLst>
           </p:cNvPr>
@@ -1364,7 +1364,7 @@
           <p:cNvPr id="7" name="logo-slot-fictional-lab-logo">
             <a:extLst xmlns:a="http://schemas.openxmlformats.org/drawingml/2006/main">
               <a:ext uri="{FF2B5EF4-FFF2-40B4-BE49-F238E27FC236}">
-                <a16:creationId xmlns:a16="http://schemas.microsoft.com/office/drawing/2014/main" id="{43F806D8-661A-4353-BB1B-F87B6CC423D7}"/>
+                <a16:creationId xmlns:a16="http://schemas.microsoft.com/office/drawing/2014/main" id="{99797987-BA3F-4B85-BF1A-BD37A15BA7C2}"/>
               </a:ext>
             </a:extLst>
           </p:cNvPr>
@@ -1399,7 +1399,7 @@
           <p:cNvPr id="8" name="logo-placeholder-fictional-lab-logo">
             <a:extLst xmlns:a="http://schemas.openxmlformats.org/drawingml/2006/main">
               <a:ext uri="{FF2B5EF4-FFF2-40B4-BE49-F238E27FC236}">
-                <a16:creationId xmlns:a16="http://schemas.microsoft.com/office/drawing/2014/main" id="{80F67072-C89F-420D-A3B5-4CD08EBC6641}"/>
+                <a16:creationId xmlns:a16="http://schemas.microsoft.com/office/drawing/2014/main" id="{BDD5AE8A-2634-4476-82F2-B44D9153A823}"/>
               </a:ext>
             </a:extLst>
           </p:cNvPr>
@@ -1449,7 +1449,7 @@
           <p:cNvPr id="9" name="header-summary">
             <a:extLst xmlns:a="http://schemas.openxmlformats.org/drawingml/2006/main">
               <a:ext uri="{FF2B5EF4-FFF2-40B4-BE49-F238E27FC236}">
-                <a16:creationId xmlns:a16="http://schemas.microsoft.com/office/drawing/2014/main" id="{B2812025-5F3C-430A-8342-B3FA388FEB59}"/>
+                <a16:creationId xmlns:a16="http://schemas.microsoft.com/office/drawing/2014/main" id="{C92E0CD1-1597-4D6F-828A-D2B6BB53E261}"/>
               </a:ext>
             </a:extLst>
           </p:cNvPr>
@@ -1482,7 +1482,7 @@
           <p:cNvPr id="10" name="header-metric-1-value">
             <a:extLst xmlns:a="http://schemas.openxmlformats.org/drawingml/2006/main">
               <a:ext uri="{FF2B5EF4-FFF2-40B4-BE49-F238E27FC236}">
-                <a16:creationId xmlns:a16="http://schemas.microsoft.com/office/drawing/2014/main" id="{6CB753B4-108B-4163-A53C-EA86695E25AE}"/>
+                <a16:creationId xmlns:a16="http://schemas.microsoft.com/office/drawing/2014/main" id="{86BB8CD0-E99E-46AB-A7AA-EFD75CDA15EC}"/>
               </a:ext>
             </a:extLst>
           </p:cNvPr>
@@ -1532,18 +1532,18 @@
           <p:cNvPr id="11" name="header-metric-1-label">
             <a:extLst xmlns:a="http://schemas.openxmlformats.org/drawingml/2006/main">
               <a:ext uri="{FF2B5EF4-FFF2-40B4-BE49-F238E27FC236}">
-                <a16:creationId xmlns:a16="http://schemas.microsoft.com/office/drawing/2014/main" id="{11F3E17E-8152-40E3-AB04-5EBFCC960749}"/>
-              </a:ext>
-            </a:extLst>
-          </p:cNvPr>
-          <p:cNvSpPr>
-            <a:spLocks xmlns:a="http://schemas.openxmlformats.org/drawingml/2006/main" noGrp="1"/>
-          </p:cNvSpPr>
-          <p:nvPr/>
-        </p:nvSpPr>
-        <p:spPr>
-          <a:xfrm xmlns:a="http://schemas.openxmlformats.org/drawingml/2006/main">
-            <a:off x="32766000" y="3067050"/>
+                <a16:creationId xmlns:a16="http://schemas.microsoft.com/office/drawing/2014/main" id="{13DA302F-005F-4F64-9AA1-5873CE420D0C}"/>
+              </a:ext>
+            </a:extLst>
+          </p:cNvPr>
+          <p:cNvSpPr>
+            <a:spLocks xmlns:a="http://schemas.openxmlformats.org/drawingml/2006/main" noGrp="1"/>
+          </p:cNvSpPr>
+          <p:nvPr/>
+        </p:nvSpPr>
+        <p:spPr>
+          <a:xfrm xmlns:a="http://schemas.openxmlformats.org/drawingml/2006/main">
+            <a:off x="32766000" y="3028950"/>
             <a:ext cx="2476500" cy="838200"/>
           </a:xfrm>
           <a:prstGeom xmlns:a="http://schemas.openxmlformats.org/drawingml/2006/main" prst="rect">
@@ -1582,7 +1582,7 @@
           <p:cNvPr id="12" name="header-metric-2-value">
             <a:extLst xmlns:a="http://schemas.openxmlformats.org/drawingml/2006/main">
               <a:ext uri="{FF2B5EF4-FFF2-40B4-BE49-F238E27FC236}">
-                <a16:creationId xmlns:a16="http://schemas.microsoft.com/office/drawing/2014/main" id="{61D5D63F-367C-42AE-A14D-D40BCADCC5B4}"/>
+                <a16:creationId xmlns:a16="http://schemas.microsoft.com/office/drawing/2014/main" id="{CECC9864-FB7F-48BC-AF5D-8D600EE2AEBE}"/>
               </a:ext>
             </a:extLst>
           </p:cNvPr>
@@ -1632,18 +1632,18 @@
           <p:cNvPr id="13" name="header-metric-2-label">
             <a:extLst xmlns:a="http://schemas.openxmlformats.org/drawingml/2006/main">
               <a:ext uri="{FF2B5EF4-FFF2-40B4-BE49-F238E27FC236}">
-                <a16:creationId xmlns:a16="http://schemas.microsoft.com/office/drawing/2014/main" id="{C63D2639-0458-4B77-B01F-40C0B1FFAA72}"/>
-              </a:ext>
-            </a:extLst>
-          </p:cNvPr>
-          <p:cNvSpPr>
-            <a:spLocks xmlns:a="http://schemas.openxmlformats.org/drawingml/2006/main" noGrp="1"/>
-          </p:cNvSpPr>
-          <p:nvPr/>
-        </p:nvSpPr>
-        <p:spPr>
-          <a:xfrm xmlns:a="http://schemas.openxmlformats.org/drawingml/2006/main">
-            <a:off x="35623500" y="3067050"/>
+                <a16:creationId xmlns:a16="http://schemas.microsoft.com/office/drawing/2014/main" id="{9C8291AA-9455-43FD-9314-5BD999A21B54}"/>
+              </a:ext>
+            </a:extLst>
+          </p:cNvPr>
+          <p:cNvSpPr>
+            <a:spLocks xmlns:a="http://schemas.openxmlformats.org/drawingml/2006/main" noGrp="1"/>
+          </p:cNvSpPr>
+          <p:nvPr/>
+        </p:nvSpPr>
+        <p:spPr>
+          <a:xfrm xmlns:a="http://schemas.openxmlformats.org/drawingml/2006/main">
+            <a:off x="35623500" y="3028950"/>
             <a:ext cx="2476500" cy="838200"/>
           </a:xfrm>
           <a:prstGeom xmlns:a="http://schemas.openxmlformats.org/drawingml/2006/main" prst="rect">
@@ -1682,7 +1682,7 @@
           <p:cNvPr id="14" name="header-metric-3-value">
             <a:extLst xmlns:a="http://schemas.openxmlformats.org/drawingml/2006/main">
               <a:ext uri="{FF2B5EF4-FFF2-40B4-BE49-F238E27FC236}">
-                <a16:creationId xmlns:a16="http://schemas.microsoft.com/office/drawing/2014/main" id="{3DD4E195-617B-4567-89EB-AF0AE0C44567}"/>
+                <a16:creationId xmlns:a16="http://schemas.microsoft.com/office/drawing/2014/main" id="{F83B6EB0-663A-4E1B-98CF-31EACDA9A8BB}"/>
               </a:ext>
             </a:extLst>
           </p:cNvPr>
@@ -1732,18 +1732,18 @@
           <p:cNvPr id="15" name="header-metric-3-label">
             <a:extLst xmlns:a="http://schemas.openxmlformats.org/drawingml/2006/main">
               <a:ext uri="{FF2B5EF4-FFF2-40B4-BE49-F238E27FC236}">
-                <a16:creationId xmlns:a16="http://schemas.microsoft.com/office/drawing/2014/main" id="{75B421C6-A685-4C69-B02F-5671890741F9}"/>
-              </a:ext>
-            </a:extLst>
-          </p:cNvPr>
-          <p:cNvSpPr>
-            <a:spLocks xmlns:a="http://schemas.openxmlformats.org/drawingml/2006/main" noGrp="1"/>
-          </p:cNvSpPr>
-          <p:nvPr/>
-        </p:nvSpPr>
-        <p:spPr>
-          <a:xfrm xmlns:a="http://schemas.openxmlformats.org/drawingml/2006/main">
-            <a:off x="38481000" y="3067050"/>
+                <a16:creationId xmlns:a16="http://schemas.microsoft.com/office/drawing/2014/main" id="{33252930-003A-4A1B-BE61-925E1AD10DFA}"/>
+              </a:ext>
+            </a:extLst>
+          </p:cNvPr>
+          <p:cNvSpPr>
+            <a:spLocks xmlns:a="http://schemas.openxmlformats.org/drawingml/2006/main" noGrp="1"/>
+          </p:cNvSpPr>
+          <p:nvPr/>
+        </p:nvSpPr>
+        <p:spPr>
+          <a:xfrm xmlns:a="http://schemas.openxmlformats.org/drawingml/2006/main">
+            <a:off x="38481000" y="3028950"/>
             <a:ext cx="2476500" cy="838200"/>
           </a:xfrm>
           <a:prstGeom xmlns:a="http://schemas.openxmlformats.org/drawingml/2006/main" prst="rect">
@@ -1782,7 +1782,7 @@
           <p:cNvPr id="16" name="question-title">
             <a:extLst xmlns:a="http://schemas.openxmlformats.org/drawingml/2006/main">
               <a:ext uri="{FF2B5EF4-FFF2-40B4-BE49-F238E27FC236}">
-                <a16:creationId xmlns:a16="http://schemas.microsoft.com/office/drawing/2014/main" id="{32DEF339-3135-4F83-92E9-4297EAF5CAF4}"/>
+                <a16:creationId xmlns:a16="http://schemas.microsoft.com/office/drawing/2014/main" id="{56E3993F-2B6D-42D0-BB0A-2DFE987DAB97}"/>
               </a:ext>
             </a:extLst>
           </p:cNvPr>
@@ -1832,7 +1832,7 @@
           <p:cNvPr id="17" name="question-rule">
             <a:extLst xmlns:a="http://schemas.openxmlformats.org/drawingml/2006/main">
               <a:ext uri="{FF2B5EF4-FFF2-40B4-BE49-F238E27FC236}">
-                <a16:creationId xmlns:a16="http://schemas.microsoft.com/office/drawing/2014/main" id="{B091A08D-6B98-4D4A-9727-E713C8E4D0E1}"/>
+                <a16:creationId xmlns:a16="http://schemas.microsoft.com/office/drawing/2014/main" id="{A9F19DA2-A951-459A-95E0-93244E3BF038}"/>
               </a:ext>
             </a:extLst>
           </p:cNvPr>
@@ -1865,7 +1865,7 @@
           <p:cNvPr id="18" name="research-question">
             <a:extLst xmlns:a="http://schemas.openxmlformats.org/drawingml/2006/main">
               <a:ext uri="{FF2B5EF4-FFF2-40B4-BE49-F238E27FC236}">
-                <a16:creationId xmlns:a16="http://schemas.microsoft.com/office/drawing/2014/main" id="{9D60CE00-5EC5-4B2B-AF27-38382C19BD68}"/>
+                <a16:creationId xmlns:a16="http://schemas.microsoft.com/office/drawing/2014/main" id="{7674288B-5D6B-4E7F-85AC-8F40BE2D4E64}"/>
               </a:ext>
             </a:extLst>
           </p:cNvPr>
@@ -1877,7 +1877,7 @@
         <p:spPr>
           <a:xfrm xmlns:a="http://schemas.openxmlformats.org/drawingml/2006/main">
             <a:off x="1333500" y="6496050"/>
-            <a:ext cx="11620500" cy="2238375"/>
+            <a:ext cx="11620500" cy="2095500"/>
           </a:xfrm>
           <a:prstGeom xmlns:a="http://schemas.openxmlformats.org/drawingml/2006/main" prst="rect">
             <a:avLst/>
@@ -1915,7 +1915,7 @@
           <p:cNvPr id="19" name="question-evidence">
             <a:extLst xmlns:a="http://schemas.openxmlformats.org/drawingml/2006/main">
               <a:ext uri="{FF2B5EF4-FFF2-40B4-BE49-F238E27FC236}">
-                <a16:creationId xmlns:a16="http://schemas.microsoft.com/office/drawing/2014/main" id="{4C7BD170-4B5C-46AC-B13F-1BF9244CA875}"/>
+                <a16:creationId xmlns:a16="http://schemas.microsoft.com/office/drawing/2014/main" id="{AE77F451-5AD8-4A49-8F21-05CBCDA3AEF4}"/>
               </a:ext>
             </a:extLst>
           </p:cNvPr>
@@ -1943,14 +1943,14 @@
           <a:lstStyle xmlns:a="http://schemas.openxmlformats.org/drawingml/2006/main"/>
           <a:p xmlns:a="http://schemas.openxmlformats.org/drawingml/2006/main">
             <a:pPr>
-              <a:defRPr sz="1875" i="1">
+              <a:defRPr sz="1875">
                 <a:solidFill>
                   <a:srgbClr val="4D8FC0"/>
                 </a:solidFill>
               </a:defRPr>
             </a:pPr>
             <a:r>
-              <a:rPr sz="1875" i="1">
+              <a:rPr sz="1875">
                 <a:solidFill>
                   <a:srgbClr val="4D8FC0"/>
                 </a:solidFill>
@@ -1965,7 +1965,7 @@
           <p:cNvPr id="20" name="pipeline-title">
             <a:extLst xmlns:a="http://schemas.openxmlformats.org/drawingml/2006/main">
               <a:ext uri="{FF2B5EF4-FFF2-40B4-BE49-F238E27FC236}">
-                <a16:creationId xmlns:a16="http://schemas.microsoft.com/office/drawing/2014/main" id="{FD5CDC3A-D76E-4174-99E8-55A6464F6B9F}"/>
+                <a16:creationId xmlns:a16="http://schemas.microsoft.com/office/drawing/2014/main" id="{5AF746B2-ED24-4C9A-B497-3AA0D02405D0}"/>
               </a:ext>
             </a:extLst>
           </p:cNvPr>
@@ -2015,7 +2015,7 @@
           <p:cNvPr id="21" name="pipeline-rule">
             <a:extLst xmlns:a="http://schemas.openxmlformats.org/drawingml/2006/main">
               <a:ext uri="{FF2B5EF4-FFF2-40B4-BE49-F238E27FC236}">
-                <a16:creationId xmlns:a16="http://schemas.microsoft.com/office/drawing/2014/main" id="{6ADDF734-174B-4B68-872D-2DFE70582F71}"/>
+                <a16:creationId xmlns:a16="http://schemas.microsoft.com/office/drawing/2014/main" id="{3DE934BE-7ADE-45D2-AA11-1F74423E861F}"/>
               </a:ext>
             </a:extLst>
           </p:cNvPr>
@@ -2048,7 +2048,7 @@
           <p:cNvPr id="22" name="pipeline-1-number-bg">
             <a:extLst xmlns:a="http://schemas.openxmlformats.org/drawingml/2006/main">
               <a:ext uri="{FF2B5EF4-FFF2-40B4-BE49-F238E27FC236}">
-                <a16:creationId xmlns:a16="http://schemas.microsoft.com/office/drawing/2014/main" id="{C9EA334F-7771-4F85-B1A3-07CD2CB1E0F4}"/>
+                <a16:creationId xmlns:a16="http://schemas.microsoft.com/office/drawing/2014/main" id="{5C5103BA-B4BE-4BB3-A8F4-EA0F1AA17BAC}"/>
               </a:ext>
             </a:extLst>
           </p:cNvPr>
@@ -2081,7 +2081,7 @@
           <p:cNvPr id="23" name="pipeline-1-number">
             <a:extLst xmlns:a="http://schemas.openxmlformats.org/drawingml/2006/main">
               <a:ext uri="{FF2B5EF4-FFF2-40B4-BE49-F238E27FC236}">
-                <a16:creationId xmlns:a16="http://schemas.microsoft.com/office/drawing/2014/main" id="{E2D0B55C-CFAE-48DA-8E6D-764AFE83ECDD}"/>
+                <a16:creationId xmlns:a16="http://schemas.microsoft.com/office/drawing/2014/main" id="{F4C8B533-0FF8-4062-9CAE-4D4C21377029}"/>
               </a:ext>
             </a:extLst>
           </p:cNvPr>
@@ -2131,7 +2131,7 @@
           <p:cNvPr id="24" name="pipeline-1-text">
             <a:extLst xmlns:a="http://schemas.openxmlformats.org/drawingml/2006/main">
               <a:ext uri="{FF2B5EF4-FFF2-40B4-BE49-F238E27FC236}">
-                <a16:creationId xmlns:a16="http://schemas.microsoft.com/office/drawing/2014/main" id="{FFF950FB-7560-4A60-8832-B985BD58F15F}"/>
+                <a16:creationId xmlns:a16="http://schemas.microsoft.com/office/drawing/2014/main" id="{670557DD-CFEE-4CAC-89D7-6645FF710CD1}"/>
               </a:ext>
             </a:extLst>
           </p:cNvPr>
@@ -2159,14 +2159,14 @@
           <a:lstStyle xmlns:a="http://schemas.openxmlformats.org/drawingml/2006/main"/>
           <a:p xmlns:a="http://schemas.openxmlformats.org/drawingml/2006/main">
             <a:pPr>
-              <a:defRPr sz="2850" b="1">
-                <a:solidFill>
-                  <a:srgbClr val="142A3B"/>
-                </a:solidFill>
-              </a:defRPr>
-            </a:pPr>
-            <a:r>
-              <a:rPr sz="2850" b="1">
+              <a:defRPr sz="2850">
+                <a:solidFill>
+                  <a:srgbClr val="142A3B"/>
+                </a:solidFill>
+              </a:defRPr>
+            </a:pPr>
+            <a:r>
+              <a:rPr sz="2850">
                 <a:solidFill>
                   <a:srgbClr val="142A3B"/>
                 </a:solidFill>
@@ -2181,7 +2181,7 @@
           <p:cNvPr id="25" name="pipeline-2-number-bg">
             <a:extLst xmlns:a="http://schemas.openxmlformats.org/drawingml/2006/main">
               <a:ext uri="{FF2B5EF4-FFF2-40B4-BE49-F238E27FC236}">
-                <a16:creationId xmlns:a16="http://schemas.microsoft.com/office/drawing/2014/main" id="{AE9AB45A-3D9E-4BAA-9251-87DACE1D9536}"/>
+                <a16:creationId xmlns:a16="http://schemas.microsoft.com/office/drawing/2014/main" id="{BF8162AF-722F-4AA8-AAA5-ADC41D26B456}"/>
               </a:ext>
             </a:extLst>
           </p:cNvPr>
@@ -2214,7 +2214,7 @@
           <p:cNvPr id="26" name="pipeline-2-number">
             <a:extLst xmlns:a="http://schemas.openxmlformats.org/drawingml/2006/main">
               <a:ext uri="{FF2B5EF4-FFF2-40B4-BE49-F238E27FC236}">
-                <a16:creationId xmlns:a16="http://schemas.microsoft.com/office/drawing/2014/main" id="{DE480AA1-ACE7-43CA-B476-E2748035302C}"/>
+                <a16:creationId xmlns:a16="http://schemas.microsoft.com/office/drawing/2014/main" id="{305DC69F-F400-431D-98AC-A952D4F50457}"/>
               </a:ext>
             </a:extLst>
           </p:cNvPr>
@@ -2264,7 +2264,7 @@
           <p:cNvPr id="27" name="pipeline-2-text">
             <a:extLst xmlns:a="http://schemas.openxmlformats.org/drawingml/2006/main">
               <a:ext uri="{FF2B5EF4-FFF2-40B4-BE49-F238E27FC236}">
-                <a16:creationId xmlns:a16="http://schemas.microsoft.com/office/drawing/2014/main" id="{EF7C1BC0-16C5-4511-BEB1-13EE9BC97B08}"/>
+                <a16:creationId xmlns:a16="http://schemas.microsoft.com/office/drawing/2014/main" id="{D61E2FED-18B2-415E-8AC4-1AB79DD3DA96}"/>
               </a:ext>
             </a:extLst>
           </p:cNvPr>
@@ -2292,14 +2292,14 @@
           <a:lstStyle xmlns:a="http://schemas.openxmlformats.org/drawingml/2006/main"/>
           <a:p xmlns:a="http://schemas.openxmlformats.org/drawingml/2006/main">
             <a:pPr>
-              <a:defRPr sz="2850" b="1">
-                <a:solidFill>
-                  <a:srgbClr val="142A3B"/>
-                </a:solidFill>
-              </a:defRPr>
-            </a:pPr>
-            <a:r>
-              <a:rPr sz="2850" b="1">
+              <a:defRPr sz="2850">
+                <a:solidFill>
+                  <a:srgbClr val="142A3B"/>
+                </a:solidFill>
+              </a:defRPr>
+            </a:pPr>
+            <a:r>
+              <a:rPr sz="2850">
                 <a:solidFill>
                   <a:srgbClr val="142A3B"/>
                 </a:solidFill>
@@ -2314,7 +2314,7 @@
           <p:cNvPr id="28" name="pipeline-3-number-bg">
             <a:extLst xmlns:a="http://schemas.openxmlformats.org/drawingml/2006/main">
               <a:ext uri="{FF2B5EF4-FFF2-40B4-BE49-F238E27FC236}">
-                <a16:creationId xmlns:a16="http://schemas.microsoft.com/office/drawing/2014/main" id="{E4CC9846-209C-4BCB-92B1-46FC87F5F608}"/>
+                <a16:creationId xmlns:a16="http://schemas.microsoft.com/office/drawing/2014/main" id="{9FDA6ADF-476C-4AD3-BAC6-CF414CDE5546}"/>
               </a:ext>
             </a:extLst>
           </p:cNvPr>
@@ -2347,7 +2347,7 @@
           <p:cNvPr id="29" name="pipeline-3-number">
             <a:extLst xmlns:a="http://schemas.openxmlformats.org/drawingml/2006/main">
               <a:ext uri="{FF2B5EF4-FFF2-40B4-BE49-F238E27FC236}">
-                <a16:creationId xmlns:a16="http://schemas.microsoft.com/office/drawing/2014/main" id="{F1B6C9CE-07BF-43B8-B6A2-4A27F78B8716}"/>
+                <a16:creationId xmlns:a16="http://schemas.microsoft.com/office/drawing/2014/main" id="{2E263673-B5F5-430D-A6A4-A85644E8DF64}"/>
               </a:ext>
             </a:extLst>
           </p:cNvPr>
@@ -2397,7 +2397,7 @@
           <p:cNvPr id="30" name="pipeline-3-text">
             <a:extLst xmlns:a="http://schemas.openxmlformats.org/drawingml/2006/main">
               <a:ext uri="{FF2B5EF4-FFF2-40B4-BE49-F238E27FC236}">
-                <a16:creationId xmlns:a16="http://schemas.microsoft.com/office/drawing/2014/main" id="{C8F317A5-623E-448F-8323-99F4C3915AB1}"/>
+                <a16:creationId xmlns:a16="http://schemas.microsoft.com/office/drawing/2014/main" id="{D7413A13-3390-462C-813F-C6898D8394C6}"/>
               </a:ext>
             </a:extLst>
           </p:cNvPr>
@@ -2425,14 +2425,14 @@
           <a:lstStyle xmlns:a="http://schemas.openxmlformats.org/drawingml/2006/main"/>
           <a:p xmlns:a="http://schemas.openxmlformats.org/drawingml/2006/main">
             <a:pPr>
-              <a:defRPr sz="2850" b="1">
-                <a:solidFill>
-                  <a:srgbClr val="142A3B"/>
-                </a:solidFill>
-              </a:defRPr>
-            </a:pPr>
-            <a:r>
-              <a:rPr sz="2850" b="1">
+              <a:defRPr sz="2850">
+                <a:solidFill>
+                  <a:srgbClr val="142A3B"/>
+                </a:solidFill>
+              </a:defRPr>
+            </a:pPr>
+            <a:r>
+              <a:rPr sz="2850">
                 <a:solidFill>
                   <a:srgbClr val="142A3B"/>
                 </a:solidFill>
@@ -2447,7 +2447,7 @@
           <p:cNvPr id="31" name="pipeline-4-number-bg">
             <a:extLst xmlns:a="http://schemas.openxmlformats.org/drawingml/2006/main">
               <a:ext uri="{FF2B5EF4-FFF2-40B4-BE49-F238E27FC236}">
-                <a16:creationId xmlns:a16="http://schemas.microsoft.com/office/drawing/2014/main" id="{EC7E0AE0-2CFD-488E-9F38-0CFB4B9711F6}"/>
+                <a16:creationId xmlns:a16="http://schemas.microsoft.com/office/drawing/2014/main" id="{F51AA791-EE4F-4B14-B216-125D105AA1F0}"/>
               </a:ext>
             </a:extLst>
           </p:cNvPr>
@@ -2480,7 +2480,7 @@
           <p:cNvPr id="32" name="pipeline-4-number">
             <a:extLst xmlns:a="http://schemas.openxmlformats.org/drawingml/2006/main">
               <a:ext uri="{FF2B5EF4-FFF2-40B4-BE49-F238E27FC236}">
-                <a16:creationId xmlns:a16="http://schemas.microsoft.com/office/drawing/2014/main" id="{054B64C0-6D07-4598-B31E-BB1D3E25DA43}"/>
+                <a16:creationId xmlns:a16="http://schemas.microsoft.com/office/drawing/2014/main" id="{62314713-D91A-42DE-B3DF-08B5F3C2F7E7}"/>
               </a:ext>
             </a:extLst>
           </p:cNvPr>
@@ -2530,7 +2530,7 @@
           <p:cNvPr id="33" name="pipeline-4-text">
             <a:extLst xmlns:a="http://schemas.openxmlformats.org/drawingml/2006/main">
               <a:ext uri="{FF2B5EF4-FFF2-40B4-BE49-F238E27FC236}">
-                <a16:creationId xmlns:a16="http://schemas.microsoft.com/office/drawing/2014/main" id="{B0E0A4B1-A2F4-4A83-87C1-831A59EC07F4}"/>
+                <a16:creationId xmlns:a16="http://schemas.microsoft.com/office/drawing/2014/main" id="{2C6B33AE-37BB-4D2B-B25F-944F86F6B192}"/>
               </a:ext>
             </a:extLst>
           </p:cNvPr>
@@ -2558,14 +2558,14 @@
           <a:lstStyle xmlns:a="http://schemas.openxmlformats.org/drawingml/2006/main"/>
           <a:p xmlns:a="http://schemas.openxmlformats.org/drawingml/2006/main">
             <a:pPr>
-              <a:defRPr sz="2850" b="1">
-                <a:solidFill>
-                  <a:srgbClr val="142A3B"/>
-                </a:solidFill>
-              </a:defRPr>
-            </a:pPr>
-            <a:r>
-              <a:rPr sz="2850" b="1">
+              <a:defRPr sz="2850">
+                <a:solidFill>
+                  <a:srgbClr val="142A3B"/>
+                </a:solidFill>
+              </a:defRPr>
+            </a:pPr>
+            <a:r>
+              <a:rPr sz="2850">
                 <a:solidFill>
                   <a:srgbClr val="142A3B"/>
                 </a:solidFill>
@@ -2580,7 +2580,7 @@
           <p:cNvPr id="34" name="dataset-panel">
             <a:extLst xmlns:a="http://schemas.openxmlformats.org/drawingml/2006/main">
               <a:ext uri="{FF2B5EF4-FFF2-40B4-BE49-F238E27FC236}">
-                <a16:creationId xmlns:a16="http://schemas.microsoft.com/office/drawing/2014/main" id="{13934A55-39BC-41AF-9E5B-90A4930A9648}"/>
+                <a16:creationId xmlns:a16="http://schemas.microsoft.com/office/drawing/2014/main" id="{9255059C-D726-4B83-9986-FE00A71C0ECB}"/>
               </a:ext>
             </a:extLst>
           </p:cNvPr>
@@ -2615,7 +2615,7 @@
           <p:cNvPr id="35" name="dataset-kicker">
             <a:extLst xmlns:a="http://schemas.openxmlformats.org/drawingml/2006/main">
               <a:ext uri="{FF2B5EF4-FFF2-40B4-BE49-F238E27FC236}">
-                <a16:creationId xmlns:a16="http://schemas.microsoft.com/office/drawing/2014/main" id="{058983E5-6A25-4A05-9BA6-26360376593F}"/>
+                <a16:creationId xmlns:a16="http://schemas.microsoft.com/office/drawing/2014/main" id="{10A2DEA9-B5F2-4718-88B5-283226896966}"/>
               </a:ext>
             </a:extLst>
           </p:cNvPr>
@@ -2662,10 +2662,10 @@
       </p:sp>
       <p:sp>
         <p:nvSpPr>
-          <p:cNvPr id="36" name="datasets">
-            <a:extLst xmlns:a="http://schemas.openxmlformats.org/drawingml/2006/main">
-              <a:ext uri="{FF2B5EF4-FFF2-40B4-BE49-F238E27FC236}">
-                <a16:creationId xmlns:a16="http://schemas.microsoft.com/office/drawing/2014/main" id="{701AAA6D-2E0C-4D9A-813E-98FDD03B248A}"/>
+          <p:cNvPr id="36" name="dataset-lead">
+            <a:extLst xmlns:a="http://schemas.openxmlformats.org/drawingml/2006/main">
+              <a:ext uri="{FF2B5EF4-FFF2-40B4-BE49-F238E27FC236}">
+                <a16:creationId xmlns:a16="http://schemas.microsoft.com/office/drawing/2014/main" id="{52F3B8E1-3154-4B11-9F6B-BB566574F48E}"/>
               </a:ext>
             </a:extLst>
           </p:cNvPr>
@@ -2677,7 +2677,57 @@
         <p:spPr>
           <a:xfrm xmlns:a="http://schemas.openxmlformats.org/drawingml/2006/main">
             <a:off x="1600200" y="14239875"/>
-            <a:ext cx="11087100" cy="2190750"/>
+            <a:ext cx="11087100" cy="514350"/>
+          </a:xfrm>
+          <a:prstGeom xmlns:a="http://schemas.openxmlformats.org/drawingml/2006/main" prst="rect">
+            <a:avLst/>
+          </a:prstGeom>
+          <a:noFill xmlns:a="http://schemas.openxmlformats.org/drawingml/2006/main"/>
+          <a:ln xmlns:a="http://schemas.openxmlformats.org/drawingml/2006/main" w="0">
+            <a:noFill/>
+            <a:prstDash val="solid"/>
+          </a:ln>
+        </p:spPr>
+        <p:txBody>
+          <a:bodyPr xmlns:a="http://schemas.openxmlformats.org/drawingml/2006/main"/>
+          <a:lstStyle xmlns:a="http://schemas.openxmlformats.org/drawingml/2006/main"/>
+          <a:p xmlns:a="http://schemas.openxmlformats.org/drawingml/2006/main">
+            <a:pPr>
+              <a:defRPr sz="2850" b="1">
+                <a:solidFill>
+                  <a:srgbClr val="142A3B"/>
+                </a:solidFill>
+              </a:defRPr>
+            </a:pPr>
+            <a:r>
+              <a:rPr sz="2850" b="1">
+                <a:solidFill>
+                  <a:srgbClr val="142A3B"/>
+                </a:solidFill>
+              </a:rPr>
+              <a:t>Four deterministic synthetic cohorts</a:t>
+            </a:r>
+          </a:p>
+        </p:txBody>
+      </p:sp>
+      <p:sp>
+        <p:nvSpPr>
+          <p:cNvPr id="37" name="datasets">
+            <a:extLst xmlns:a="http://schemas.openxmlformats.org/drawingml/2006/main">
+              <a:ext uri="{FF2B5EF4-FFF2-40B4-BE49-F238E27FC236}">
+                <a16:creationId xmlns:a16="http://schemas.microsoft.com/office/drawing/2014/main" id="{EF5F3B73-D5A5-42A7-A765-EB9BF064E903}"/>
+              </a:ext>
+            </a:extLst>
+          </p:cNvPr>
+          <p:cNvSpPr>
+            <a:spLocks xmlns:a="http://schemas.openxmlformats.org/drawingml/2006/main" noGrp="1"/>
+          </p:cNvSpPr>
+          <p:nvPr/>
+        </p:nvSpPr>
+        <p:spPr>
+          <a:xfrm xmlns:a="http://schemas.openxmlformats.org/drawingml/2006/main">
+            <a:off x="1600200" y="14820900"/>
+            <a:ext cx="11087100" cy="1476375"/>
           </a:xfrm>
           <a:prstGeom xmlns:a="http://schemas.openxmlformats.org/drawingml/2006/main" prst="rect">
             <a:avLst/>
@@ -2705,7 +2755,7 @@
                   <a:srgbClr val="142A3B"/>
                 </a:solidFill>
               </a:rPr>
-              <a:t>Discovery n=620 · Internal validation n=310</a:t>
+              <a:t>• Discovery n=620 · Internal validation n=310</a:t>
             </a:r>
           </a:p>
           <a:p xmlns:a="http://schemas.openxmlformats.org/drawingml/2006/main">
@@ -2722,7 +2772,7 @@
                   <a:srgbClr val="142A3B"/>
                 </a:solidFill>
               </a:rPr>
-              <a:t>External simulation A n=186 · External simulation B n=124</a:t>
+              <a:t>• External A n=186 · External B n=124</a:t>
             </a:r>
           </a:p>
           <a:p xmlns:a="http://schemas.openxmlformats.org/drawingml/2006/main">
@@ -2739,17 +2789,17 @@
                   <a:srgbClr val="142A3B"/>
                 </a:solidFill>
               </a:rPr>
-              <a:t>All values are authored fixtures; no participant, specimen, institution, registry or external dataset exists.</a:t>
-            </a:r>
-          </a:p>
-        </p:txBody>
-      </p:sp>
-      <p:sp>
-        <p:nvSpPr>
-          <p:cNvPr id="37" name="dataset-evidence">
-            <a:extLst xmlns:a="http://schemas.openxmlformats.org/drawingml/2006/main">
-              <a:ext uri="{FF2B5EF4-FFF2-40B4-BE49-F238E27FC236}">
-                <a16:creationId xmlns:a16="http://schemas.microsoft.com/office/drawing/2014/main" id="{C8DB8990-0D94-4B5C-858F-8C9BAFD0BF00}"/>
+              <a:t>• No participants, specimens or external datasets</a:t>
+            </a:r>
+          </a:p>
+        </p:txBody>
+      </p:sp>
+      <p:sp>
+        <p:nvSpPr>
+          <p:cNvPr id="38" name="dataset-evidence">
+            <a:extLst xmlns:a="http://schemas.openxmlformats.org/drawingml/2006/main">
+              <a:ext uri="{FF2B5EF4-FFF2-40B4-BE49-F238E27FC236}">
+                <a16:creationId xmlns:a16="http://schemas.microsoft.com/office/drawing/2014/main" id="{25768952-59E6-44DF-B644-F31E71380B8D}"/>
               </a:ext>
             </a:extLst>
           </p:cNvPr>
@@ -2777,14 +2827,14 @@
           <a:lstStyle xmlns:a="http://schemas.openxmlformats.org/drawingml/2006/main"/>
           <a:p xmlns:a="http://schemas.openxmlformats.org/drawingml/2006/main">
             <a:pPr>
-              <a:defRPr sz="1875" i="1">
+              <a:defRPr sz="1875">
                 <a:solidFill>
                   <a:srgbClr val="4D8FC0"/>
                 </a:solidFill>
               </a:defRPr>
             </a:pPr>
             <a:r>
-              <a:rPr sz="1875" i="1">
+              <a:rPr sz="1875">
                 <a:solidFill>
                   <a:srgbClr val="4D8FC0"/>
                 </a:solidFill>
@@ -2796,10 +2846,10 @@
       </p:sp>
       <p:sp>
         <p:nvSpPr>
-          <p:cNvPr id="38" name="figure-one-heading-title">
-            <a:extLst xmlns:a="http://schemas.openxmlformats.org/drawingml/2006/main">
-              <a:ext uri="{FF2B5EF4-FFF2-40B4-BE49-F238E27FC236}">
-                <a16:creationId xmlns:a16="http://schemas.microsoft.com/office/drawing/2014/main" id="{F71E7731-E311-41DF-A70C-91F808769C4A}"/>
+          <p:cNvPr id="39" name="figure-one-heading-title">
+            <a:extLst xmlns:a="http://schemas.openxmlformats.org/drawingml/2006/main">
+              <a:ext uri="{FF2B5EF4-FFF2-40B4-BE49-F238E27FC236}">
+                <a16:creationId xmlns:a16="http://schemas.microsoft.com/office/drawing/2014/main" id="{97B553C0-77E6-451A-A8E6-24E99F22C755}"/>
               </a:ext>
             </a:extLst>
           </p:cNvPr>
@@ -2846,10 +2896,10 @@
       </p:sp>
       <p:sp>
         <p:nvSpPr>
-          <p:cNvPr id="39" name="figure-one-heading-rule">
-            <a:extLst xmlns:a="http://schemas.openxmlformats.org/drawingml/2006/main">
-              <a:ext uri="{FF2B5EF4-FFF2-40B4-BE49-F238E27FC236}">
-                <a16:creationId xmlns:a16="http://schemas.microsoft.com/office/drawing/2014/main" id="{B61004FB-ECF7-43E5-8A8E-8C384D5C867A}"/>
+          <p:cNvPr id="40" name="figure-one-heading-rule">
+            <a:extLst xmlns:a="http://schemas.openxmlformats.org/drawingml/2006/main">
+              <a:ext uri="{FF2B5EF4-FFF2-40B4-BE49-F238E27FC236}">
+                <a16:creationId xmlns:a16="http://schemas.microsoft.com/office/drawing/2014/main" id="{DBFDC793-C456-48D3-A649-789EF7EAA2CE}"/>
               </a:ext>
             </a:extLst>
           </p:cNvPr>
@@ -2879,10 +2929,10 @@
       </p:sp>
       <p:sp>
         <p:nvSpPr>
-          <p:cNvPr id="40" name="figure-one-frame">
-            <a:extLst xmlns:a="http://schemas.openxmlformats.org/drawingml/2006/main">
-              <a:ext uri="{FF2B5EF4-FFF2-40B4-BE49-F238E27FC236}">
-                <a16:creationId xmlns:a16="http://schemas.microsoft.com/office/drawing/2014/main" id="{F4F8A325-5CBE-43BE-95D8-96384F5C52DA}"/>
+          <p:cNvPr id="41" name="figure-one-frame">
+            <a:extLst xmlns:a="http://schemas.openxmlformats.org/drawingml/2006/main">
+              <a:ext uri="{FF2B5EF4-FFF2-40B4-BE49-F238E27FC236}">
+                <a16:creationId xmlns:a16="http://schemas.microsoft.com/office/drawing/2014/main" id="{D1227100-B431-4106-81ED-F9D0436270E9}"/>
               </a:ext>
             </a:extLst>
           </p:cNvPr>
@@ -2914,17 +2964,17 @@
       </p:sp>
       <p:pic>
         <p:nvPicPr>
-          <p:cNvPr id="128" name=""/>
+          <p:cNvPr id="131" name=""/>
           <p:cNvPicPr>
             <a:picLocks xmlns:a="http://schemas.openxmlformats.org/drawingml/2006/main" noChangeAspect="1"/>
           </p:cNvPicPr>
           <p:nvPr/>
         </p:nvPicPr>
         <p:blipFill>
-          <a:blip xmlns:r="http://schemas.openxmlformats.org/officeDocument/2006/relationships" xmlns:a="http://schemas.openxmlformats.org/drawingml/2006/main" r:embed="R73b90a0785354ac5">
+          <a:blip xmlns:r="http://schemas.openxmlformats.org/officeDocument/2006/relationships" xmlns:a="http://schemas.openxmlformats.org/drawingml/2006/main" r:embed="Rcb45386aaf3f4c20">
             <a:extLst>
               <a:ext uri="{96DAC541-7B7A-43D3-8B79-37D633B846F1}">
-                <asvg:svgBlip xmlns:asvg="http://schemas.microsoft.com/office/drawing/2016/SVG/main" r:embed="R7942f37f9c504936"/>
+                <asvg:svgBlip xmlns:asvg="http://schemas.microsoft.com/office/drawing/2016/SVG/main" r:embed="Rb476472f416d48ff"/>
               </a:ext>
             </a:extLst>
           </a:blip>
@@ -2942,10 +2992,10 @@
       </p:pic>
       <p:sp>
         <p:nvSpPr>
-          <p:cNvPr id="42" name="figure-one-caption">
-            <a:extLst xmlns:a="http://schemas.openxmlformats.org/drawingml/2006/main">
-              <a:ext uri="{FF2B5EF4-FFF2-40B4-BE49-F238E27FC236}">
-                <a16:creationId xmlns:a16="http://schemas.microsoft.com/office/drawing/2014/main" id="{B062BCF0-7AC0-42BA-AC4F-1DD8948E0427}"/>
+          <p:cNvPr id="43" name="figure-one-caption">
+            <a:extLst xmlns:a="http://schemas.openxmlformats.org/drawingml/2006/main">
+              <a:ext uri="{FF2B5EF4-FFF2-40B4-BE49-F238E27FC236}">
+                <a16:creationId xmlns:a16="http://schemas.microsoft.com/office/drawing/2014/main" id="{E51C7E73-239E-47EB-8067-AA81493C524E}"/>
               </a:ext>
             </a:extLst>
           </p:cNvPr>
@@ -2957,7 +3007,7 @@
         <p:spPr>
           <a:xfrm xmlns:a="http://schemas.openxmlformats.org/drawingml/2006/main">
             <a:off x="1562100" y="27460575"/>
-            <a:ext cx="11163300" cy="400050"/>
+            <a:ext cx="11163300" cy="314325"/>
           </a:xfrm>
           <a:prstGeom xmlns:a="http://schemas.openxmlformats.org/drawingml/2006/main" prst="rect">
             <a:avLst/>
@@ -2992,21 +3042,21 @@
       </p:sp>
       <p:sp>
         <p:nvSpPr>
-          <p:cNvPr id="43" name="figure-one-source">
-            <a:extLst xmlns:a="http://schemas.openxmlformats.org/drawingml/2006/main">
-              <a:ext uri="{FF2B5EF4-FFF2-40B4-BE49-F238E27FC236}">
-                <a16:creationId xmlns:a16="http://schemas.microsoft.com/office/drawing/2014/main" id="{6154AAD9-6500-4D82-895C-8F2E1C925609}"/>
-              </a:ext>
-            </a:extLst>
-          </p:cNvPr>
-          <p:cNvSpPr>
-            <a:spLocks xmlns:a="http://schemas.openxmlformats.org/drawingml/2006/main" noGrp="1"/>
-          </p:cNvSpPr>
-          <p:nvPr/>
-        </p:nvSpPr>
-        <p:spPr>
-          <a:xfrm xmlns:a="http://schemas.openxmlformats.org/drawingml/2006/main">
-            <a:off x="1562100" y="27774900"/>
+          <p:cNvPr id="44" name="figure-one-source">
+            <a:extLst xmlns:a="http://schemas.openxmlformats.org/drawingml/2006/main">
+              <a:ext uri="{FF2B5EF4-FFF2-40B4-BE49-F238E27FC236}">
+                <a16:creationId xmlns:a16="http://schemas.microsoft.com/office/drawing/2014/main" id="{C57165DC-9FC0-480B-A060-B70481C0C728}"/>
+              </a:ext>
+            </a:extLst>
+          </p:cNvPr>
+          <p:cNvSpPr>
+            <a:spLocks xmlns:a="http://schemas.openxmlformats.org/drawingml/2006/main" noGrp="1"/>
+          </p:cNvSpPr>
+          <p:nvPr/>
+        </p:nvSpPr>
+        <p:spPr>
+          <a:xfrm xmlns:a="http://schemas.openxmlformats.org/drawingml/2006/main">
+            <a:off x="1562100" y="27784425"/>
             <a:ext cx="11163300" cy="361950"/>
           </a:xfrm>
           <a:prstGeom xmlns:a="http://schemas.openxmlformats.org/drawingml/2006/main" prst="rect">
@@ -3023,14 +3073,14 @@
           <a:lstStyle xmlns:a="http://schemas.openxmlformats.org/drawingml/2006/main"/>
           <a:p xmlns:a="http://schemas.openxmlformats.org/drawingml/2006/main">
             <a:pPr>
-              <a:defRPr sz="1875" i="1">
+              <a:defRPr sz="1875">
                 <a:solidFill>
                   <a:srgbClr val="4D8FC0"/>
                 </a:solidFill>
               </a:defRPr>
             </a:pPr>
             <a:r>
-              <a:rPr sz="1875" i="1">
+              <a:rPr sz="1875">
                 <a:solidFill>
                   <a:srgbClr val="4D8FC0"/>
                 </a:solidFill>
@@ -3042,10 +3092,10 @@
       </p:sp>
       <p:sp>
         <p:nvSpPr>
-          <p:cNvPr id="44" name="central-takeaway">
-            <a:extLst xmlns:a="http://schemas.openxmlformats.org/drawingml/2006/main">
-              <a:ext uri="{FF2B5EF4-FFF2-40B4-BE49-F238E27FC236}">
-                <a16:creationId xmlns:a16="http://schemas.microsoft.com/office/drawing/2014/main" id="{A10A1865-73B2-43DD-B2E6-EDA3B1904612}"/>
+          <p:cNvPr id="45" name="central-takeaway">
+            <a:extLst xmlns:a="http://schemas.openxmlformats.org/drawingml/2006/main">
+              <a:ext uri="{FF2B5EF4-FFF2-40B4-BE49-F238E27FC236}">
+                <a16:creationId xmlns:a16="http://schemas.microsoft.com/office/drawing/2014/main" id="{2C6DCF16-27BA-41BF-8A47-4A73C3899AF0}"/>
               </a:ext>
             </a:extLst>
           </p:cNvPr>
@@ -3075,10 +3125,10 @@
       </p:sp>
       <p:sp>
         <p:nvSpPr>
-          <p:cNvPr id="45" name="central-takeaway-title">
-            <a:extLst xmlns:a="http://schemas.openxmlformats.org/drawingml/2006/main">
-              <a:ext uri="{FF2B5EF4-FFF2-40B4-BE49-F238E27FC236}">
-                <a16:creationId xmlns:a16="http://schemas.microsoft.com/office/drawing/2014/main" id="{26D7232A-D173-4D07-BB26-E03239206217}"/>
+          <p:cNvPr id="46" name="central-takeaway-title">
+            <a:extLst xmlns:a="http://schemas.openxmlformats.org/drawingml/2006/main">
+              <a:ext uri="{FF2B5EF4-FFF2-40B4-BE49-F238E27FC236}">
+                <a16:creationId xmlns:a16="http://schemas.microsoft.com/office/drawing/2014/main" id="{936A081D-C3FB-4E85-90F6-039A3295FFB9}"/>
               </a:ext>
             </a:extLst>
           </p:cNvPr>
@@ -3118,17 +3168,17 @@
                   <a:srgbClr val="142A3B"/>
                 </a:solidFill>
               </a:rPr>
-              <a:t>External simulations retained C-indices of 0.75 and 0.74</a:t>
-            </a:r>
-          </a:p>
-        </p:txBody>
-      </p:sp>
-      <p:sp>
-        <p:nvSpPr>
-          <p:cNvPr id="46" name="central-takeaway-subtitle">
-            <a:extLst xmlns:a="http://schemas.openxmlformats.org/drawingml/2006/main">
-              <a:ext uri="{FF2B5EF4-FFF2-40B4-BE49-F238E27FC236}">
-                <a16:creationId xmlns:a16="http://schemas.microsoft.com/office/drawing/2014/main" id="{496E70C7-DD77-49C2-99CB-05492A8039F8}"/>
+              <a:t>External C-indices remained 0.75 and 0.74</a:t>
+            </a:r>
+          </a:p>
+        </p:txBody>
+      </p:sp>
+      <p:sp>
+        <p:nvSpPr>
+          <p:cNvPr id="47" name="central-takeaway-subtitle">
+            <a:extLst xmlns:a="http://schemas.openxmlformats.org/drawingml/2006/main">
+              <a:ext uri="{FF2B5EF4-FFF2-40B4-BE49-F238E27FC236}">
+                <a16:creationId xmlns:a16="http://schemas.microsoft.com/office/drawing/2014/main" id="{E8171DCE-7AC3-4DD6-BAA6-3B15049DBEA6}"/>
               </a:ext>
             </a:extLst>
           </p:cNvPr>
@@ -3175,10 +3225,10 @@
       </p:sp>
       <p:sp>
         <p:nvSpPr>
-          <p:cNvPr id="47" name="takeaway-evidence">
-            <a:extLst xmlns:a="http://schemas.openxmlformats.org/drawingml/2006/main">
-              <a:ext uri="{FF2B5EF4-FFF2-40B4-BE49-F238E27FC236}">
-                <a16:creationId xmlns:a16="http://schemas.microsoft.com/office/drawing/2014/main" id="{6971BE61-2677-4786-A8C2-EF14F2E084EB}"/>
+          <p:cNvPr id="48" name="takeaway-evidence">
+            <a:extLst xmlns:a="http://schemas.openxmlformats.org/drawingml/2006/main">
+              <a:ext uri="{FF2B5EF4-FFF2-40B4-BE49-F238E27FC236}">
+                <a16:creationId xmlns:a16="http://schemas.microsoft.com/office/drawing/2014/main" id="{AD83978F-F47E-4189-AD39-9B05CD008DDE}"/>
               </a:ext>
             </a:extLst>
           </p:cNvPr>
@@ -3206,14 +3256,14 @@
           <a:lstStyle xmlns:a="http://schemas.openxmlformats.org/drawingml/2006/main"/>
           <a:p xmlns:a="http://schemas.openxmlformats.org/drawingml/2006/main">
             <a:pPr>
-              <a:defRPr sz="1875" i="1">
+              <a:defRPr sz="1875">
                 <a:solidFill>
                   <a:srgbClr val="4D8FC0"/>
                 </a:solidFill>
               </a:defRPr>
             </a:pPr>
             <a:r>
-              <a:rPr sz="1875" i="1">
+              <a:rPr sz="1875">
                 <a:solidFill>
                   <a:srgbClr val="4D8FC0"/>
                 </a:solidFill>
@@ -3225,10 +3275,10 @@
       </p:sp>
       <p:sp>
         <p:nvSpPr>
-          <p:cNvPr id="48" name="figure-two-heading-title">
-            <a:extLst xmlns:a="http://schemas.openxmlformats.org/drawingml/2006/main">
-              <a:ext uri="{FF2B5EF4-FFF2-40B4-BE49-F238E27FC236}">
-                <a16:creationId xmlns:a16="http://schemas.microsoft.com/office/drawing/2014/main" id="{B80D3CFC-F1CF-440C-81E5-79AD52765A81}"/>
+          <p:cNvPr id="49" name="figure-two-heading-title">
+            <a:extLst xmlns:a="http://schemas.openxmlformats.org/drawingml/2006/main">
+              <a:ext uri="{FF2B5EF4-FFF2-40B4-BE49-F238E27FC236}">
+                <a16:creationId xmlns:a16="http://schemas.microsoft.com/office/drawing/2014/main" id="{5AA794B6-9030-4ACE-8260-37C29F82B16A}"/>
               </a:ext>
             </a:extLst>
           </p:cNvPr>
@@ -3275,10 +3325,10 @@
       </p:sp>
       <p:sp>
         <p:nvSpPr>
-          <p:cNvPr id="49" name="figure-two-heading-rule">
-            <a:extLst xmlns:a="http://schemas.openxmlformats.org/drawingml/2006/main">
-              <a:ext uri="{FF2B5EF4-FFF2-40B4-BE49-F238E27FC236}">
-                <a16:creationId xmlns:a16="http://schemas.microsoft.com/office/drawing/2014/main" id="{999D56B0-C745-4966-86D1-222382A22FF4}"/>
+          <p:cNvPr id="50" name="figure-two-heading-rule">
+            <a:extLst xmlns:a="http://schemas.openxmlformats.org/drawingml/2006/main">
+              <a:ext uri="{FF2B5EF4-FFF2-40B4-BE49-F238E27FC236}">
+                <a16:creationId xmlns:a16="http://schemas.microsoft.com/office/drawing/2014/main" id="{E1822E3F-5BCA-4836-855C-D708BC41E1EB}"/>
               </a:ext>
             </a:extLst>
           </p:cNvPr>
@@ -3308,10 +3358,10 @@
       </p:sp>
       <p:sp>
         <p:nvSpPr>
-          <p:cNvPr id="50" name="figure-two-frame">
-            <a:extLst xmlns:a="http://schemas.openxmlformats.org/drawingml/2006/main">
-              <a:ext uri="{FF2B5EF4-FFF2-40B4-BE49-F238E27FC236}">
-                <a16:creationId xmlns:a16="http://schemas.microsoft.com/office/drawing/2014/main" id="{84336CF8-898F-4024-8B5E-30D0C643DC28}"/>
+          <p:cNvPr id="51" name="figure-two-frame">
+            <a:extLst xmlns:a="http://schemas.openxmlformats.org/drawingml/2006/main">
+              <a:ext uri="{FF2B5EF4-FFF2-40B4-BE49-F238E27FC236}">
+                <a16:creationId xmlns:a16="http://schemas.microsoft.com/office/drawing/2014/main" id="{FD86C108-A558-4E21-9563-D0C6B4ED444A}"/>
               </a:ext>
             </a:extLst>
           </p:cNvPr>
@@ -3343,17 +3393,17 @@
       </p:sp>
       <p:pic>
         <p:nvPicPr>
-          <p:cNvPr id="138" name=""/>
+          <p:cNvPr id="141" name=""/>
           <p:cNvPicPr>
             <a:picLocks xmlns:a="http://schemas.openxmlformats.org/drawingml/2006/main" noChangeAspect="1"/>
           </p:cNvPicPr>
           <p:nvPr/>
         </p:nvPicPr>
         <p:blipFill>
-          <a:blip xmlns:r="http://schemas.openxmlformats.org/officeDocument/2006/relationships" xmlns:a="http://schemas.openxmlformats.org/drawingml/2006/main" r:embed="R9cc061dad54a405a">
+          <a:blip xmlns:r="http://schemas.openxmlformats.org/officeDocument/2006/relationships" xmlns:a="http://schemas.openxmlformats.org/drawingml/2006/main" r:embed="R75e94a6dd52f45fc">
             <a:extLst>
               <a:ext uri="{96DAC541-7B7A-43D3-8B79-37D633B846F1}">
-                <asvg:svgBlip xmlns:asvg="http://schemas.microsoft.com/office/drawing/2016/SVG/main" r:embed="R54e8b5bd8a124d18"/>
+                <asvg:svgBlip xmlns:asvg="http://schemas.microsoft.com/office/drawing/2016/SVG/main" r:embed="R90788e68ded34be4"/>
               </a:ext>
             </a:extLst>
           </a:blip>
@@ -3371,10 +3421,10 @@
       </p:pic>
       <p:sp>
         <p:nvSpPr>
-          <p:cNvPr id="52" name="figure-two-caption">
-            <a:extLst xmlns:a="http://schemas.openxmlformats.org/drawingml/2006/main">
-              <a:ext uri="{FF2B5EF4-FFF2-40B4-BE49-F238E27FC236}">
-                <a16:creationId xmlns:a16="http://schemas.microsoft.com/office/drawing/2014/main" id="{BA2C5790-F03E-48AB-B231-6D0E41A06948}"/>
+          <p:cNvPr id="53" name="figure-two-caption">
+            <a:extLst xmlns:a="http://schemas.openxmlformats.org/drawingml/2006/main">
+              <a:ext uri="{FF2B5EF4-FFF2-40B4-BE49-F238E27FC236}">
+                <a16:creationId xmlns:a16="http://schemas.microsoft.com/office/drawing/2014/main" id="{42DC0B43-5898-494A-994A-61F8EF3F46CD}"/>
               </a:ext>
             </a:extLst>
           </p:cNvPr>
@@ -3386,7 +3436,7 @@
         <p:spPr>
           <a:xfrm xmlns:a="http://schemas.openxmlformats.org/drawingml/2006/main">
             <a:off x="13754100" y="21507450"/>
-            <a:ext cx="13211175" cy="400050"/>
+            <a:ext cx="13211175" cy="314325"/>
           </a:xfrm>
           <a:prstGeom xmlns:a="http://schemas.openxmlformats.org/drawingml/2006/main" prst="rect">
             <a:avLst/>
@@ -3421,21 +3471,21 @@
       </p:sp>
       <p:sp>
         <p:nvSpPr>
-          <p:cNvPr id="53" name="figure-two-source">
-            <a:extLst xmlns:a="http://schemas.openxmlformats.org/drawingml/2006/main">
-              <a:ext uri="{FF2B5EF4-FFF2-40B4-BE49-F238E27FC236}">
-                <a16:creationId xmlns:a16="http://schemas.microsoft.com/office/drawing/2014/main" id="{F845716B-7930-460E-A742-0D274C52B2DE}"/>
-              </a:ext>
-            </a:extLst>
-          </p:cNvPr>
-          <p:cNvSpPr>
-            <a:spLocks xmlns:a="http://schemas.openxmlformats.org/drawingml/2006/main" noGrp="1"/>
-          </p:cNvSpPr>
-          <p:nvPr/>
-        </p:nvSpPr>
-        <p:spPr>
-          <a:xfrm xmlns:a="http://schemas.openxmlformats.org/drawingml/2006/main">
-            <a:off x="13754100" y="21821775"/>
+          <p:cNvPr id="54" name="figure-two-source">
+            <a:extLst xmlns:a="http://schemas.openxmlformats.org/drawingml/2006/main">
+              <a:ext uri="{FF2B5EF4-FFF2-40B4-BE49-F238E27FC236}">
+                <a16:creationId xmlns:a16="http://schemas.microsoft.com/office/drawing/2014/main" id="{8769CF03-599A-4F5A-A8E8-F657884511AF}"/>
+              </a:ext>
+            </a:extLst>
+          </p:cNvPr>
+          <p:cNvSpPr>
+            <a:spLocks xmlns:a="http://schemas.openxmlformats.org/drawingml/2006/main" noGrp="1"/>
+          </p:cNvSpPr>
+          <p:nvPr/>
+        </p:nvSpPr>
+        <p:spPr>
+          <a:xfrm xmlns:a="http://schemas.openxmlformats.org/drawingml/2006/main">
+            <a:off x="13754100" y="21831300"/>
             <a:ext cx="13211175" cy="361950"/>
           </a:xfrm>
           <a:prstGeom xmlns:a="http://schemas.openxmlformats.org/drawingml/2006/main" prst="rect">
@@ -3452,14 +3502,14 @@
           <a:lstStyle xmlns:a="http://schemas.openxmlformats.org/drawingml/2006/main"/>
           <a:p xmlns:a="http://schemas.openxmlformats.org/drawingml/2006/main">
             <a:pPr>
-              <a:defRPr sz="1875" i="1">
+              <a:defRPr sz="1875">
                 <a:solidFill>
                   <a:srgbClr val="4D8FC0"/>
                 </a:solidFill>
               </a:defRPr>
             </a:pPr>
             <a:r>
-              <a:rPr sz="1875" i="1">
+              <a:rPr sz="1875">
                 <a:solidFill>
                   <a:srgbClr val="4D8FC0"/>
                 </a:solidFill>
@@ -3471,10 +3521,10 @@
       </p:sp>
       <p:sp>
         <p:nvSpPr>
-          <p:cNvPr id="54" name="validation-heading-title">
-            <a:extLst xmlns:a="http://schemas.openxmlformats.org/drawingml/2006/main">
-              <a:ext uri="{FF2B5EF4-FFF2-40B4-BE49-F238E27FC236}">
-                <a16:creationId xmlns:a16="http://schemas.microsoft.com/office/drawing/2014/main" id="{441B8DE1-6059-41B6-8111-4FEFD0A1D1D1}"/>
+          <p:cNvPr id="55" name="validation-heading-title">
+            <a:extLst xmlns:a="http://schemas.openxmlformats.org/drawingml/2006/main">
+              <a:ext uri="{FF2B5EF4-FFF2-40B4-BE49-F238E27FC236}">
+                <a16:creationId xmlns:a16="http://schemas.microsoft.com/office/drawing/2014/main" id="{521D920E-4E14-4C0A-8F76-DF9D424DAD53}"/>
               </a:ext>
             </a:extLst>
           </p:cNvPr>
@@ -3521,10 +3571,10 @@
       </p:sp>
       <p:sp>
         <p:nvSpPr>
-          <p:cNvPr id="55" name="validation-heading-rule">
-            <a:extLst xmlns:a="http://schemas.openxmlformats.org/drawingml/2006/main">
-              <a:ext uri="{FF2B5EF4-FFF2-40B4-BE49-F238E27FC236}">
-                <a16:creationId xmlns:a16="http://schemas.microsoft.com/office/drawing/2014/main" id="{F0D3C483-20D2-4851-A8C1-00718E4189EE}"/>
+          <p:cNvPr id="56" name="validation-heading-rule">
+            <a:extLst xmlns:a="http://schemas.openxmlformats.org/drawingml/2006/main">
+              <a:ext uri="{FF2B5EF4-FFF2-40B4-BE49-F238E27FC236}">
+                <a16:creationId xmlns:a16="http://schemas.microsoft.com/office/drawing/2014/main" id="{DE5D19DD-8E94-4EB5-BF4A-B7D2DA629C46}"/>
               </a:ext>
             </a:extLst>
           </p:cNvPr>
@@ -3554,10 +3604,10 @@
       </p:sp>
       <p:sp>
         <p:nvSpPr>
-          <p:cNvPr id="56" name="validation-panel">
-            <a:extLst xmlns:a="http://schemas.openxmlformats.org/drawingml/2006/main">
-              <a:ext uri="{FF2B5EF4-FFF2-40B4-BE49-F238E27FC236}">
-                <a16:creationId xmlns:a16="http://schemas.microsoft.com/office/drawing/2014/main" id="{0C38EDC1-317E-4DAB-8643-3985329CC853}"/>
+          <p:cNvPr id="57" name="validation-panel">
+            <a:extLst xmlns:a="http://schemas.openxmlformats.org/drawingml/2006/main">
+              <a:ext uri="{FF2B5EF4-FFF2-40B4-BE49-F238E27FC236}">
+                <a16:creationId xmlns:a16="http://schemas.microsoft.com/office/drawing/2014/main" id="{9104FD5A-D768-44B0-BDCE-411CAA2581B9}"/>
               </a:ext>
             </a:extLst>
           </p:cNvPr>
@@ -3589,10 +3639,10 @@
       </p:sp>
       <p:sp>
         <p:nvSpPr>
-          <p:cNvPr id="57" name="validation">
-            <a:extLst xmlns:a="http://schemas.openxmlformats.org/drawingml/2006/main">
-              <a:ext uri="{FF2B5EF4-FFF2-40B4-BE49-F238E27FC236}">
-                <a16:creationId xmlns:a16="http://schemas.microsoft.com/office/drawing/2014/main" id="{20835071-7B6C-4F83-971F-ADC3CA7B40F9}"/>
+          <p:cNvPr id="58" name="validation">
+            <a:extLst xmlns:a="http://schemas.openxmlformats.org/drawingml/2006/main">
+              <a:ext uri="{FF2B5EF4-FFF2-40B4-BE49-F238E27FC236}">
+                <a16:creationId xmlns:a16="http://schemas.microsoft.com/office/drawing/2014/main" id="{4C373D8E-0F6C-477A-AA57-9E650C63F349}"/>
               </a:ext>
             </a:extLst>
           </p:cNvPr>
@@ -3690,10 +3740,10 @@
       </p:sp>
       <p:sp>
         <p:nvSpPr>
-          <p:cNvPr id="58" name="validation-evidence">
-            <a:extLst xmlns:a="http://schemas.openxmlformats.org/drawingml/2006/main">
-              <a:ext uri="{FF2B5EF4-FFF2-40B4-BE49-F238E27FC236}">
-                <a16:creationId xmlns:a16="http://schemas.microsoft.com/office/drawing/2014/main" id="{C2211AD4-3568-4FB9-A0A1-FD6963BABE6F}"/>
+          <p:cNvPr id="59" name="validation-evidence">
+            <a:extLst xmlns:a="http://schemas.openxmlformats.org/drawingml/2006/main">
+              <a:ext uri="{FF2B5EF4-FFF2-40B4-BE49-F238E27FC236}">
+                <a16:creationId xmlns:a16="http://schemas.microsoft.com/office/drawing/2014/main" id="{1AE14347-1286-4C3D-BD6A-47832E250FCC}"/>
               </a:ext>
             </a:extLst>
           </p:cNvPr>
@@ -3721,14 +3771,14 @@
           <a:lstStyle xmlns:a="http://schemas.openxmlformats.org/drawingml/2006/main"/>
           <a:p xmlns:a="http://schemas.openxmlformats.org/drawingml/2006/main">
             <a:pPr>
-              <a:defRPr sz="1875" i="1">
+              <a:defRPr sz="1875">
                 <a:solidFill>
                   <a:srgbClr val="4D8FC0"/>
                 </a:solidFill>
               </a:defRPr>
             </a:pPr>
             <a:r>
-              <a:rPr sz="1875" i="1">
+              <a:rPr sz="1875">
                 <a:solidFill>
                   <a:srgbClr val="4D8FC0"/>
                 </a:solidFill>
@@ -3740,10 +3790,10 @@
       </p:sp>
       <p:sp>
         <p:nvSpPr>
-          <p:cNvPr id="59" name="performance-strip">
-            <a:extLst xmlns:a="http://schemas.openxmlformats.org/drawingml/2006/main">
-              <a:ext uri="{FF2B5EF4-FFF2-40B4-BE49-F238E27FC236}">
-                <a16:creationId xmlns:a16="http://schemas.microsoft.com/office/drawing/2014/main" id="{8B8948AD-5FF4-4B6D-9D96-62A0914A4C38}"/>
+          <p:cNvPr id="60" name="performance-strip">
+            <a:extLst xmlns:a="http://schemas.openxmlformats.org/drawingml/2006/main">
+              <a:ext uri="{FF2B5EF4-FFF2-40B4-BE49-F238E27FC236}">
+                <a16:creationId xmlns:a16="http://schemas.microsoft.com/office/drawing/2014/main" id="{E3EADBF2-E21F-4C43-AFFD-2CB542D97250}"/>
               </a:ext>
             </a:extLst>
           </p:cNvPr>
@@ -3773,10 +3823,10 @@
       </p:sp>
       <p:sp>
         <p:nvSpPr>
-          <p:cNvPr id="60" name="performance-strip-text">
-            <a:extLst xmlns:a="http://schemas.openxmlformats.org/drawingml/2006/main">
-              <a:ext uri="{FF2B5EF4-FFF2-40B4-BE49-F238E27FC236}">
-                <a16:creationId xmlns:a16="http://schemas.microsoft.com/office/drawing/2014/main" id="{1FCDA659-B079-4E0C-BB75-CF531DD22A37}"/>
+          <p:cNvPr id="61" name="performance-strip-text">
+            <a:extLst xmlns:a="http://schemas.openxmlformats.org/drawingml/2006/main">
+              <a:ext uri="{FF2B5EF4-FFF2-40B4-BE49-F238E27FC236}">
+                <a16:creationId xmlns:a16="http://schemas.microsoft.com/office/drawing/2014/main" id="{AF08EBE6-7773-4744-A00B-E2DA05C9262C}"/>
               </a:ext>
             </a:extLst>
           </p:cNvPr>
@@ -3816,17 +3866,17 @@
                   <a:srgbClr val="FFFFFF"/>
                 </a:solidFill>
               </a:rPr>
-              <a:t>AURORA-12 vs baseline C-index · Discovery 0.78 vs 0.68 · Internal 0.76 vs 0.67 · External A 0.75 vs 0.66 · External B 0.74 vs 0.65</a:t>
-            </a:r>
-          </a:p>
-        </p:txBody>
-      </p:sp>
-      <p:sp>
-        <p:nvSpPr>
-          <p:cNvPr id="61" name="biology-heading-title">
-            <a:extLst xmlns:a="http://schemas.openxmlformats.org/drawingml/2006/main">
-              <a:ext uri="{FF2B5EF4-FFF2-40B4-BE49-F238E27FC236}">
-                <a16:creationId xmlns:a16="http://schemas.microsoft.com/office/drawing/2014/main" id="{5FD3300F-5E47-4046-8EF2-2E7F3884961E}"/>
+              <a:t>External validation retained discrimination: C-index 0.75 / 0.74</a:t>
+            </a:r>
+          </a:p>
+        </p:txBody>
+      </p:sp>
+      <p:sp>
+        <p:nvSpPr>
+          <p:cNvPr id="62" name="biology-heading-title">
+            <a:extLst xmlns:a="http://schemas.openxmlformats.org/drawingml/2006/main">
+              <a:ext uri="{FF2B5EF4-FFF2-40B4-BE49-F238E27FC236}">
+                <a16:creationId xmlns:a16="http://schemas.microsoft.com/office/drawing/2014/main" id="{AB904CCA-547C-4579-844C-7E52081B4592}"/>
               </a:ext>
             </a:extLst>
           </p:cNvPr>
@@ -3873,10 +3923,10 @@
       </p:sp>
       <p:sp>
         <p:nvSpPr>
-          <p:cNvPr id="62" name="biology-heading-rule">
-            <a:extLst xmlns:a="http://schemas.openxmlformats.org/drawingml/2006/main">
-              <a:ext uri="{FF2B5EF4-FFF2-40B4-BE49-F238E27FC236}">
-                <a16:creationId xmlns:a16="http://schemas.microsoft.com/office/drawing/2014/main" id="{19672EC9-0ED0-4B39-BC32-461003D57199}"/>
+          <p:cNvPr id="63" name="biology-heading-rule">
+            <a:extLst xmlns:a="http://schemas.openxmlformats.org/drawingml/2006/main">
+              <a:ext uri="{FF2B5EF4-FFF2-40B4-BE49-F238E27FC236}">
+                <a16:creationId xmlns:a16="http://schemas.microsoft.com/office/drawing/2014/main" id="{AF537563-8EF5-4406-80F2-F2CC46888612}"/>
               </a:ext>
             </a:extLst>
           </p:cNvPr>
@@ -3906,10 +3956,10 @@
       </p:sp>
       <p:sp>
         <p:nvSpPr>
-          <p:cNvPr id="63" name="biology-1-value">
-            <a:extLst xmlns:a="http://schemas.openxmlformats.org/drawingml/2006/main">
-              <a:ext uri="{FF2B5EF4-FFF2-40B4-BE49-F238E27FC236}">
-                <a16:creationId xmlns:a16="http://schemas.microsoft.com/office/drawing/2014/main" id="{04F9ED51-FD56-43F1-8493-36F538EC8AE2}"/>
+          <p:cNvPr id="64" name="biology-1-value">
+            <a:extLst xmlns:a="http://schemas.openxmlformats.org/drawingml/2006/main">
+              <a:ext uri="{FF2B5EF4-FFF2-40B4-BE49-F238E27FC236}">
+                <a16:creationId xmlns:a16="http://schemas.microsoft.com/office/drawing/2014/main" id="{E16F293B-1BE4-4FAA-842F-454C34576D17}"/>
               </a:ext>
             </a:extLst>
           </p:cNvPr>
@@ -3956,21 +4006,21 @@
       </p:sp>
       <p:sp>
         <p:nvSpPr>
-          <p:cNvPr id="64" name="biology-1-label">
-            <a:extLst xmlns:a="http://schemas.openxmlformats.org/drawingml/2006/main">
-              <a:ext uri="{FF2B5EF4-FFF2-40B4-BE49-F238E27FC236}">
-                <a16:creationId xmlns:a16="http://schemas.microsoft.com/office/drawing/2014/main" id="{A0212DE4-4100-4519-B31C-B215278B61F7}"/>
-              </a:ext>
-            </a:extLst>
-          </p:cNvPr>
-          <p:cNvSpPr>
-            <a:spLocks xmlns:a="http://schemas.openxmlformats.org/drawingml/2006/main" noGrp="1"/>
-          </p:cNvSpPr>
-          <p:nvPr/>
-        </p:nvSpPr>
-        <p:spPr>
-          <a:xfrm xmlns:a="http://schemas.openxmlformats.org/drawingml/2006/main">
-            <a:off x="27765375" y="7353300"/>
+          <p:cNvPr id="65" name="biology-1-label">
+            <a:extLst xmlns:a="http://schemas.openxmlformats.org/drawingml/2006/main">
+              <a:ext uri="{FF2B5EF4-FFF2-40B4-BE49-F238E27FC236}">
+                <a16:creationId xmlns:a16="http://schemas.microsoft.com/office/drawing/2014/main" id="{FE1F4DE2-9938-4C6F-A118-7DEEE770D6B9}"/>
+              </a:ext>
+            </a:extLst>
+          </p:cNvPr>
+          <p:cNvSpPr>
+            <a:spLocks xmlns:a="http://schemas.openxmlformats.org/drawingml/2006/main" noGrp="1"/>
+          </p:cNvSpPr>
+          <p:nvPr/>
+        </p:nvSpPr>
+        <p:spPr>
+          <a:xfrm xmlns:a="http://schemas.openxmlformats.org/drawingml/2006/main">
+            <a:off x="27765375" y="7315200"/>
             <a:ext cx="4000500" cy="838200"/>
           </a:xfrm>
           <a:prstGeom xmlns:a="http://schemas.openxmlformats.org/drawingml/2006/main" prst="rect">
@@ -4006,10 +4056,10 @@
       </p:sp>
       <p:sp>
         <p:nvSpPr>
-          <p:cNvPr id="65" name="biology-2-value">
-            <a:extLst xmlns:a="http://schemas.openxmlformats.org/drawingml/2006/main">
-              <a:ext uri="{FF2B5EF4-FFF2-40B4-BE49-F238E27FC236}">
-                <a16:creationId xmlns:a16="http://schemas.microsoft.com/office/drawing/2014/main" id="{2261AFDC-689E-4DEF-B8B8-531F24D5F5EC}"/>
+          <p:cNvPr id="66" name="biology-2-value">
+            <a:extLst xmlns:a="http://schemas.openxmlformats.org/drawingml/2006/main">
+              <a:ext uri="{FF2B5EF4-FFF2-40B4-BE49-F238E27FC236}">
+                <a16:creationId xmlns:a16="http://schemas.microsoft.com/office/drawing/2014/main" id="{10472984-C7A1-4220-AB75-3D3E81DBB6B6}"/>
               </a:ext>
             </a:extLst>
           </p:cNvPr>
@@ -4056,21 +4106,21 @@
       </p:sp>
       <p:sp>
         <p:nvSpPr>
-          <p:cNvPr id="66" name="biology-2-label">
-            <a:extLst xmlns:a="http://schemas.openxmlformats.org/drawingml/2006/main">
-              <a:ext uri="{FF2B5EF4-FFF2-40B4-BE49-F238E27FC236}">
-                <a16:creationId xmlns:a16="http://schemas.microsoft.com/office/drawing/2014/main" id="{6B313940-7E3F-49C3-8D8A-4BA622618400}"/>
-              </a:ext>
-            </a:extLst>
-          </p:cNvPr>
-          <p:cNvSpPr>
-            <a:spLocks xmlns:a="http://schemas.openxmlformats.org/drawingml/2006/main" noGrp="1"/>
-          </p:cNvSpPr>
-          <p:nvPr/>
-        </p:nvSpPr>
-        <p:spPr>
-          <a:xfrm xmlns:a="http://schemas.openxmlformats.org/drawingml/2006/main">
-            <a:off x="32289750" y="7353300"/>
+          <p:cNvPr id="67" name="biology-2-label">
+            <a:extLst xmlns:a="http://schemas.openxmlformats.org/drawingml/2006/main">
+              <a:ext uri="{FF2B5EF4-FFF2-40B4-BE49-F238E27FC236}">
+                <a16:creationId xmlns:a16="http://schemas.microsoft.com/office/drawing/2014/main" id="{1A557B9D-5272-4E62-B729-4F221ECFF12D}"/>
+              </a:ext>
+            </a:extLst>
+          </p:cNvPr>
+          <p:cNvSpPr>
+            <a:spLocks xmlns:a="http://schemas.openxmlformats.org/drawingml/2006/main" noGrp="1"/>
+          </p:cNvSpPr>
+          <p:nvPr/>
+        </p:nvSpPr>
+        <p:spPr>
+          <a:xfrm xmlns:a="http://schemas.openxmlformats.org/drawingml/2006/main">
+            <a:off x="32289750" y="7315200"/>
             <a:ext cx="4000500" cy="838200"/>
           </a:xfrm>
           <a:prstGeom xmlns:a="http://schemas.openxmlformats.org/drawingml/2006/main" prst="rect">
@@ -4106,10 +4156,10 @@
       </p:sp>
       <p:sp>
         <p:nvSpPr>
-          <p:cNvPr id="67" name="biology-3-value">
-            <a:extLst xmlns:a="http://schemas.openxmlformats.org/drawingml/2006/main">
-              <a:ext uri="{FF2B5EF4-FFF2-40B4-BE49-F238E27FC236}">
-                <a16:creationId xmlns:a16="http://schemas.microsoft.com/office/drawing/2014/main" id="{3912E674-F6A6-4CE3-91E5-17CB47988EB8}"/>
+          <p:cNvPr id="68" name="biology-3-value">
+            <a:extLst xmlns:a="http://schemas.openxmlformats.org/drawingml/2006/main">
+              <a:ext uri="{FF2B5EF4-FFF2-40B4-BE49-F238E27FC236}">
+                <a16:creationId xmlns:a16="http://schemas.microsoft.com/office/drawing/2014/main" id="{7659185F-0EDB-4F58-8B19-49A6E010DEBE}"/>
               </a:ext>
             </a:extLst>
           </p:cNvPr>
@@ -4137,14 +4187,14 @@
           <a:lstStyle xmlns:a="http://schemas.openxmlformats.org/drawingml/2006/main"/>
           <a:p xmlns:a="http://schemas.openxmlformats.org/drawingml/2006/main">
             <a:pPr>
-              <a:defRPr sz="5100" b="1">
+              <a:defRPr sz="4125" b="1">
                 <a:solidFill>
                   <a:srgbClr val="D77A70"/>
                 </a:solidFill>
               </a:defRPr>
             </a:pPr>
             <a:r>
-              <a:rPr sz="5100" b="1">
+              <a:rPr sz="4125" b="1">
                 <a:solidFill>
                   <a:srgbClr val="D77A70"/>
                 </a:solidFill>
@@ -4156,21 +4206,21 @@
       </p:sp>
       <p:sp>
         <p:nvSpPr>
-          <p:cNvPr id="68" name="biology-3-label">
-            <a:extLst xmlns:a="http://schemas.openxmlformats.org/drawingml/2006/main">
-              <a:ext uri="{FF2B5EF4-FFF2-40B4-BE49-F238E27FC236}">
-                <a16:creationId xmlns:a16="http://schemas.microsoft.com/office/drawing/2014/main" id="{8651B5B7-A60A-4258-8512-62DB6AB6B09D}"/>
-              </a:ext>
-            </a:extLst>
-          </p:cNvPr>
-          <p:cNvSpPr>
-            <a:spLocks xmlns:a="http://schemas.openxmlformats.org/drawingml/2006/main" noGrp="1"/>
-          </p:cNvSpPr>
-          <p:nvPr/>
-        </p:nvSpPr>
-        <p:spPr>
-          <a:xfrm xmlns:a="http://schemas.openxmlformats.org/drawingml/2006/main">
-            <a:off x="36814125" y="7353300"/>
+          <p:cNvPr id="69" name="biology-3-label">
+            <a:extLst xmlns:a="http://schemas.openxmlformats.org/drawingml/2006/main">
+              <a:ext uri="{FF2B5EF4-FFF2-40B4-BE49-F238E27FC236}">
+                <a16:creationId xmlns:a16="http://schemas.microsoft.com/office/drawing/2014/main" id="{A14DC263-6EA4-486E-A66C-52C88218040D}"/>
+              </a:ext>
+            </a:extLst>
+          </p:cNvPr>
+          <p:cNvSpPr>
+            <a:spLocks xmlns:a="http://schemas.openxmlformats.org/drawingml/2006/main" noGrp="1"/>
+          </p:cNvSpPr>
+          <p:nvPr/>
+        </p:nvSpPr>
+        <p:spPr>
+          <a:xfrm xmlns:a="http://schemas.openxmlformats.org/drawingml/2006/main">
+            <a:off x="36814125" y="7315200"/>
             <a:ext cx="4000500" cy="838200"/>
           </a:xfrm>
           <a:prstGeom xmlns:a="http://schemas.openxmlformats.org/drawingml/2006/main" prst="rect">
@@ -4206,10 +4256,10 @@
       </p:sp>
       <p:sp>
         <p:nvSpPr>
-          <p:cNvPr id="69" name="biology-evidence">
-            <a:extLst xmlns:a="http://schemas.openxmlformats.org/drawingml/2006/main">
-              <a:ext uri="{FF2B5EF4-FFF2-40B4-BE49-F238E27FC236}">
-                <a16:creationId xmlns:a16="http://schemas.microsoft.com/office/drawing/2014/main" id="{5F55A6CB-EFFA-407D-9EA2-4C0BC08684E7}"/>
+          <p:cNvPr id="70" name="biology-evidence">
+            <a:extLst xmlns:a="http://schemas.openxmlformats.org/drawingml/2006/main">
+              <a:ext uri="{FF2B5EF4-FFF2-40B4-BE49-F238E27FC236}">
+                <a16:creationId xmlns:a16="http://schemas.microsoft.com/office/drawing/2014/main" id="{62325B9F-A83A-47A1-A6DC-F4D03F7544D0}"/>
               </a:ext>
             </a:extLst>
           </p:cNvPr>
@@ -4237,14 +4287,14 @@
           <a:lstStyle xmlns:a="http://schemas.openxmlformats.org/drawingml/2006/main"/>
           <a:p xmlns:a="http://schemas.openxmlformats.org/drawingml/2006/main">
             <a:pPr>
-              <a:defRPr sz="1875" i="1">
+              <a:defRPr sz="1875">
                 <a:solidFill>
                   <a:srgbClr val="4D8FC0"/>
                 </a:solidFill>
               </a:defRPr>
             </a:pPr>
             <a:r>
-              <a:rPr sz="1875" i="1">
+              <a:rPr sz="1875">
                 <a:solidFill>
                   <a:srgbClr val="4D8FC0"/>
                 </a:solidFill>
@@ -4256,10 +4306,10 @@
       </p:sp>
       <p:sp>
         <p:nvSpPr>
-          <p:cNvPr id="70" name="figure-three-frame">
-            <a:extLst xmlns:a="http://schemas.openxmlformats.org/drawingml/2006/main">
-              <a:ext uri="{FF2B5EF4-FFF2-40B4-BE49-F238E27FC236}">
-                <a16:creationId xmlns:a16="http://schemas.microsoft.com/office/drawing/2014/main" id="{3160B5D0-6B85-4C87-A734-3019E8730227}"/>
+          <p:cNvPr id="71" name="figure-three-frame">
+            <a:extLst xmlns:a="http://schemas.openxmlformats.org/drawingml/2006/main">
+              <a:ext uri="{FF2B5EF4-FFF2-40B4-BE49-F238E27FC236}">
+                <a16:creationId xmlns:a16="http://schemas.microsoft.com/office/drawing/2014/main" id="{9609AB88-B3DA-41EE-B3A2-ADCE0679F9A7}"/>
               </a:ext>
             </a:extLst>
           </p:cNvPr>
@@ -4291,17 +4341,17 @@
       </p:sp>
       <p:pic>
         <p:nvPicPr>
-          <p:cNvPr id="158" name=""/>
+          <p:cNvPr id="161" name=""/>
           <p:cNvPicPr>
             <a:picLocks xmlns:a="http://schemas.openxmlformats.org/drawingml/2006/main" noChangeAspect="1"/>
           </p:cNvPicPr>
           <p:nvPr/>
         </p:nvPicPr>
         <p:blipFill>
-          <a:blip xmlns:r="http://schemas.openxmlformats.org/officeDocument/2006/relationships" xmlns:a="http://schemas.openxmlformats.org/drawingml/2006/main" r:embed="R7f287c44190e4a57">
+          <a:blip xmlns:r="http://schemas.openxmlformats.org/officeDocument/2006/relationships" xmlns:a="http://schemas.openxmlformats.org/drawingml/2006/main" r:embed="R64627a5239804d19">
             <a:extLst>
               <a:ext uri="{96DAC541-7B7A-43D3-8B79-37D633B846F1}">
-                <asvg:svgBlip xmlns:asvg="http://schemas.microsoft.com/office/drawing/2016/SVG/main" r:embed="R6820284fd1ca42a1"/>
+                <asvg:svgBlip xmlns:asvg="http://schemas.microsoft.com/office/drawing/2016/SVG/main" r:embed="R098207d9ec7340a5"/>
               </a:ext>
             </a:extLst>
           </a:blip>
@@ -4319,10 +4369,10 @@
       </p:pic>
       <p:sp>
         <p:nvSpPr>
-          <p:cNvPr id="72" name="figure-three-caption">
-            <a:extLst xmlns:a="http://schemas.openxmlformats.org/drawingml/2006/main">
-              <a:ext uri="{FF2B5EF4-FFF2-40B4-BE49-F238E27FC236}">
-                <a16:creationId xmlns:a16="http://schemas.microsoft.com/office/drawing/2014/main" id="{4E45405F-BF1B-41DE-96C1-2E1A295486D2}"/>
+          <p:cNvPr id="73" name="figure-three-caption">
+            <a:extLst xmlns:a="http://schemas.openxmlformats.org/drawingml/2006/main">
+              <a:ext uri="{FF2B5EF4-FFF2-40B4-BE49-F238E27FC236}">
+                <a16:creationId xmlns:a16="http://schemas.microsoft.com/office/drawing/2014/main" id="{3B359D3B-DD3B-4725-83E6-4F49DC6A5A29}"/>
               </a:ext>
             </a:extLst>
           </p:cNvPr>
@@ -4334,7 +4384,7 @@
         <p:spPr>
           <a:xfrm xmlns:a="http://schemas.openxmlformats.org/drawingml/2006/main">
             <a:off x="27993975" y="15363825"/>
-            <a:ext cx="13249275" cy="400050"/>
+            <a:ext cx="13249275" cy="314325"/>
           </a:xfrm>
           <a:prstGeom xmlns:a="http://schemas.openxmlformats.org/drawingml/2006/main" prst="rect">
             <a:avLst/>
@@ -4369,21 +4419,21 @@
       </p:sp>
       <p:sp>
         <p:nvSpPr>
-          <p:cNvPr id="73" name="figure-three-source">
-            <a:extLst xmlns:a="http://schemas.openxmlformats.org/drawingml/2006/main">
-              <a:ext uri="{FF2B5EF4-FFF2-40B4-BE49-F238E27FC236}">
-                <a16:creationId xmlns:a16="http://schemas.microsoft.com/office/drawing/2014/main" id="{E32CEFAD-2A0F-4F2A-9C41-8C417B0BEC56}"/>
-              </a:ext>
-            </a:extLst>
-          </p:cNvPr>
-          <p:cNvSpPr>
-            <a:spLocks xmlns:a="http://schemas.openxmlformats.org/drawingml/2006/main" noGrp="1"/>
-          </p:cNvSpPr>
-          <p:nvPr/>
-        </p:nvSpPr>
-        <p:spPr>
-          <a:xfrm xmlns:a="http://schemas.openxmlformats.org/drawingml/2006/main">
-            <a:off x="27993975" y="15678150"/>
+          <p:cNvPr id="74" name="figure-three-source">
+            <a:extLst xmlns:a="http://schemas.openxmlformats.org/drawingml/2006/main">
+              <a:ext uri="{FF2B5EF4-FFF2-40B4-BE49-F238E27FC236}">
+                <a16:creationId xmlns:a16="http://schemas.microsoft.com/office/drawing/2014/main" id="{CA628EC5-521F-4F0F-89B0-9BDE75076897}"/>
+              </a:ext>
+            </a:extLst>
+          </p:cNvPr>
+          <p:cNvSpPr>
+            <a:spLocks xmlns:a="http://schemas.openxmlformats.org/drawingml/2006/main" noGrp="1"/>
+          </p:cNvSpPr>
+          <p:nvPr/>
+        </p:nvSpPr>
+        <p:spPr>
+          <a:xfrm xmlns:a="http://schemas.openxmlformats.org/drawingml/2006/main">
+            <a:off x="27993975" y="15687675"/>
             <a:ext cx="13249275" cy="361950"/>
           </a:xfrm>
           <a:prstGeom xmlns:a="http://schemas.openxmlformats.org/drawingml/2006/main" prst="rect">
@@ -4400,14 +4450,14 @@
           <a:lstStyle xmlns:a="http://schemas.openxmlformats.org/drawingml/2006/main"/>
           <a:p xmlns:a="http://schemas.openxmlformats.org/drawingml/2006/main">
             <a:pPr>
-              <a:defRPr sz="1875" i="1">
+              <a:defRPr sz="1875">
                 <a:solidFill>
                   <a:srgbClr val="4D8FC0"/>
                 </a:solidFill>
               </a:defRPr>
             </a:pPr>
             <a:r>
-              <a:rPr sz="1875" i="1">
+              <a:rPr sz="1875">
                 <a:solidFill>
                   <a:srgbClr val="4D8FC0"/>
                 </a:solidFill>
@@ -4419,10 +4469,10 @@
       </p:sp>
       <p:sp>
         <p:nvSpPr>
-          <p:cNvPr id="74" name="validation-visual-heading-title">
-            <a:extLst xmlns:a="http://schemas.openxmlformats.org/drawingml/2006/main">
-              <a:ext uri="{FF2B5EF4-FFF2-40B4-BE49-F238E27FC236}">
-                <a16:creationId xmlns:a16="http://schemas.microsoft.com/office/drawing/2014/main" id="{2CA82F6B-362E-45C4-8CA4-1EB86C185B1A}"/>
+          <p:cNvPr id="75" name="validation-visual-heading-title">
+            <a:extLst xmlns:a="http://schemas.openxmlformats.org/drawingml/2006/main">
+              <a:ext uri="{FF2B5EF4-FFF2-40B4-BE49-F238E27FC236}">
+                <a16:creationId xmlns:a16="http://schemas.microsoft.com/office/drawing/2014/main" id="{44C56C99-DC65-48D0-BA72-0ADB51C8C1A5}"/>
               </a:ext>
             </a:extLst>
           </p:cNvPr>
@@ -4469,10 +4519,10 @@
       </p:sp>
       <p:sp>
         <p:nvSpPr>
-          <p:cNvPr id="75" name="validation-visual-heading-rule">
-            <a:extLst xmlns:a="http://schemas.openxmlformats.org/drawingml/2006/main">
-              <a:ext uri="{FF2B5EF4-FFF2-40B4-BE49-F238E27FC236}">
-                <a16:creationId xmlns:a16="http://schemas.microsoft.com/office/drawing/2014/main" id="{6E1CA57D-7E39-4AAF-B0F4-3E3EE87335AD}"/>
+          <p:cNvPr id="76" name="validation-visual-heading-rule">
+            <a:extLst xmlns:a="http://schemas.openxmlformats.org/drawingml/2006/main">
+              <a:ext uri="{FF2B5EF4-FFF2-40B4-BE49-F238E27FC236}">
+                <a16:creationId xmlns:a16="http://schemas.microsoft.com/office/drawing/2014/main" id="{C9075224-2128-47A5-B00B-25A6D5AD254C}"/>
               </a:ext>
             </a:extLst>
           </p:cNvPr>
@@ -4502,10 +4552,10 @@
       </p:sp>
       <p:sp>
         <p:nvSpPr>
-          <p:cNvPr id="76" name="figure-four-frame">
-            <a:extLst xmlns:a="http://schemas.openxmlformats.org/drawingml/2006/main">
-              <a:ext uri="{FF2B5EF4-FFF2-40B4-BE49-F238E27FC236}">
-                <a16:creationId xmlns:a16="http://schemas.microsoft.com/office/drawing/2014/main" id="{538B4491-04F3-49C9-A56F-126C3E61E257}"/>
+          <p:cNvPr id="77" name="figure-four-frame">
+            <a:extLst xmlns:a="http://schemas.openxmlformats.org/drawingml/2006/main">
+              <a:ext uri="{FF2B5EF4-FFF2-40B4-BE49-F238E27FC236}">
+                <a16:creationId xmlns:a16="http://schemas.microsoft.com/office/drawing/2014/main" id="{43DB09AF-0D65-4086-B91B-8A8325032341}"/>
               </a:ext>
             </a:extLst>
           </p:cNvPr>
@@ -4537,17 +4587,17 @@
       </p:sp>
       <p:pic>
         <p:nvPicPr>
-          <p:cNvPr id="164" name=""/>
+          <p:cNvPr id="167" name=""/>
           <p:cNvPicPr>
             <a:picLocks xmlns:a="http://schemas.openxmlformats.org/drawingml/2006/main" noChangeAspect="1"/>
           </p:cNvPicPr>
           <p:nvPr/>
         </p:nvPicPr>
         <p:blipFill>
-          <a:blip xmlns:r="http://schemas.openxmlformats.org/officeDocument/2006/relationships" xmlns:a="http://schemas.openxmlformats.org/drawingml/2006/main" r:embed="R49801d64e0ee44d3">
+          <a:blip xmlns:r="http://schemas.openxmlformats.org/officeDocument/2006/relationships" xmlns:a="http://schemas.openxmlformats.org/drawingml/2006/main" r:embed="R5781393de80f467c">
             <a:extLst>
               <a:ext uri="{96DAC541-7B7A-43D3-8B79-37D633B846F1}">
-                <asvg:svgBlip xmlns:asvg="http://schemas.microsoft.com/office/drawing/2016/SVG/main" r:embed="R7d24754a04f84156"/>
+                <asvg:svgBlip xmlns:asvg="http://schemas.microsoft.com/office/drawing/2016/SVG/main" r:embed="R6cbc353da5374cc7"/>
               </a:ext>
             </a:extLst>
           </a:blip>
@@ -4565,10 +4615,10 @@
       </p:pic>
       <p:sp>
         <p:nvSpPr>
-          <p:cNvPr id="78" name="figure-four-caption">
-            <a:extLst xmlns:a="http://schemas.openxmlformats.org/drawingml/2006/main">
-              <a:ext uri="{FF2B5EF4-FFF2-40B4-BE49-F238E27FC236}">
-                <a16:creationId xmlns:a16="http://schemas.microsoft.com/office/drawing/2014/main" id="{D50CF886-0D66-4F5E-941C-A790A23A0F04}"/>
+          <p:cNvPr id="79" name="figure-four-caption">
+            <a:extLst xmlns:a="http://schemas.openxmlformats.org/drawingml/2006/main">
+              <a:ext uri="{FF2B5EF4-FFF2-40B4-BE49-F238E27FC236}">
+                <a16:creationId xmlns:a16="http://schemas.microsoft.com/office/drawing/2014/main" id="{C8F0A180-5DCF-41CC-8A85-A2BE47DF48B0}"/>
               </a:ext>
             </a:extLst>
           </p:cNvPr>
@@ -4580,7 +4630,7 @@
         <p:spPr>
           <a:xfrm xmlns:a="http://schemas.openxmlformats.org/drawingml/2006/main">
             <a:off x="27993975" y="23841075"/>
-            <a:ext cx="13249275" cy="400050"/>
+            <a:ext cx="13249275" cy="314325"/>
           </a:xfrm>
           <a:prstGeom xmlns:a="http://schemas.openxmlformats.org/drawingml/2006/main" prst="rect">
             <a:avLst/>
@@ -4615,21 +4665,21 @@
       </p:sp>
       <p:sp>
         <p:nvSpPr>
-          <p:cNvPr id="79" name="figure-four-source">
-            <a:extLst xmlns:a="http://schemas.openxmlformats.org/drawingml/2006/main">
-              <a:ext uri="{FF2B5EF4-FFF2-40B4-BE49-F238E27FC236}">
-                <a16:creationId xmlns:a16="http://schemas.microsoft.com/office/drawing/2014/main" id="{928A07FF-050F-4897-9421-D828C21B5899}"/>
-              </a:ext>
-            </a:extLst>
-          </p:cNvPr>
-          <p:cNvSpPr>
-            <a:spLocks xmlns:a="http://schemas.openxmlformats.org/drawingml/2006/main" noGrp="1"/>
-          </p:cNvSpPr>
-          <p:nvPr/>
-        </p:nvSpPr>
-        <p:spPr>
-          <a:xfrm xmlns:a="http://schemas.openxmlformats.org/drawingml/2006/main">
-            <a:off x="27993975" y="24155400"/>
+          <p:cNvPr id="80" name="figure-four-source">
+            <a:extLst xmlns:a="http://schemas.openxmlformats.org/drawingml/2006/main">
+              <a:ext uri="{FF2B5EF4-FFF2-40B4-BE49-F238E27FC236}">
+                <a16:creationId xmlns:a16="http://schemas.microsoft.com/office/drawing/2014/main" id="{A2AA8939-2A26-47C9-8E10-821359B2D4AC}"/>
+              </a:ext>
+            </a:extLst>
+          </p:cNvPr>
+          <p:cNvSpPr>
+            <a:spLocks xmlns:a="http://schemas.openxmlformats.org/drawingml/2006/main" noGrp="1"/>
+          </p:cNvSpPr>
+          <p:nvPr/>
+        </p:nvSpPr>
+        <p:spPr>
+          <a:xfrm xmlns:a="http://schemas.openxmlformats.org/drawingml/2006/main">
+            <a:off x="27993975" y="24164925"/>
             <a:ext cx="13249275" cy="361950"/>
           </a:xfrm>
           <a:prstGeom xmlns:a="http://schemas.openxmlformats.org/drawingml/2006/main" prst="rect">
@@ -4646,14 +4696,14 @@
           <a:lstStyle xmlns:a="http://schemas.openxmlformats.org/drawingml/2006/main"/>
           <a:p xmlns:a="http://schemas.openxmlformats.org/drawingml/2006/main">
             <a:pPr>
-              <a:defRPr sz="1875" i="1">
+              <a:defRPr sz="1875">
                 <a:solidFill>
                   <a:srgbClr val="4D8FC0"/>
                 </a:solidFill>
               </a:defRPr>
             </a:pPr>
             <a:r>
-              <a:rPr sz="1875" i="1">
+              <a:rPr sz="1875">
                 <a:solidFill>
                   <a:srgbClr val="4D8FC0"/>
                 </a:solidFill>
@@ -4665,10 +4715,10 @@
       </p:sp>
       <p:sp>
         <p:nvSpPr>
-          <p:cNvPr id="80" name="conclusion-heading-title">
-            <a:extLst xmlns:a="http://schemas.openxmlformats.org/drawingml/2006/main">
-              <a:ext uri="{FF2B5EF4-FFF2-40B4-BE49-F238E27FC236}">
-                <a16:creationId xmlns:a16="http://schemas.microsoft.com/office/drawing/2014/main" id="{DD14C7B2-5BDA-484C-9209-E7A42229F8EA}"/>
+          <p:cNvPr id="81" name="conclusion-heading-title">
+            <a:extLst xmlns:a="http://schemas.openxmlformats.org/drawingml/2006/main">
+              <a:ext uri="{FF2B5EF4-FFF2-40B4-BE49-F238E27FC236}">
+                <a16:creationId xmlns:a16="http://schemas.microsoft.com/office/drawing/2014/main" id="{C018B0C9-8A37-446F-BB3E-88BB0E5C0770}"/>
               </a:ext>
             </a:extLst>
           </p:cNvPr>
@@ -4715,10 +4765,10 @@
       </p:sp>
       <p:sp>
         <p:nvSpPr>
-          <p:cNvPr id="81" name="conclusion-heading-rule">
-            <a:extLst xmlns:a="http://schemas.openxmlformats.org/drawingml/2006/main">
-              <a:ext uri="{FF2B5EF4-FFF2-40B4-BE49-F238E27FC236}">
-                <a16:creationId xmlns:a16="http://schemas.microsoft.com/office/drawing/2014/main" id="{652E5529-477B-4DEB-AB35-A5724B3BED46}"/>
+          <p:cNvPr id="82" name="conclusion-heading-rule">
+            <a:extLst xmlns:a="http://schemas.openxmlformats.org/drawingml/2006/main">
+              <a:ext uri="{FF2B5EF4-FFF2-40B4-BE49-F238E27FC236}">
+                <a16:creationId xmlns:a16="http://schemas.microsoft.com/office/drawing/2014/main" id="{39E580BD-CC3D-4658-8E28-A5F3EB15EFA3}"/>
               </a:ext>
             </a:extLst>
           </p:cNvPr>
@@ -4748,10 +4798,10 @@
       </p:sp>
       <p:sp>
         <p:nvSpPr>
-          <p:cNvPr id="82" name="conclusion-panel">
-            <a:extLst xmlns:a="http://schemas.openxmlformats.org/drawingml/2006/main">
-              <a:ext uri="{FF2B5EF4-FFF2-40B4-BE49-F238E27FC236}">
-                <a16:creationId xmlns:a16="http://schemas.microsoft.com/office/drawing/2014/main" id="{080F0DA0-A4FF-4BC4-BBAD-E255B410B41E}"/>
+          <p:cNvPr id="83" name="conclusion-panel">
+            <a:extLst xmlns:a="http://schemas.openxmlformats.org/drawingml/2006/main">
+              <a:ext uri="{FF2B5EF4-FFF2-40B4-BE49-F238E27FC236}">
+                <a16:creationId xmlns:a16="http://schemas.microsoft.com/office/drawing/2014/main" id="{9DF7496A-D107-4027-8714-D1A05F867A15}"/>
               </a:ext>
             </a:extLst>
           </p:cNvPr>
@@ -4783,10 +4833,10 @@
       </p:sp>
       <p:sp>
         <p:nvSpPr>
-          <p:cNvPr id="83" name="conclusion">
-            <a:extLst xmlns:a="http://schemas.openxmlformats.org/drawingml/2006/main">
-              <a:ext uri="{FF2B5EF4-FFF2-40B4-BE49-F238E27FC236}">
-                <a16:creationId xmlns:a16="http://schemas.microsoft.com/office/drawing/2014/main" id="{29482A66-25C7-4B7B-B299-0E44F61D55BF}"/>
+          <p:cNvPr id="84" name="conclusion-lead">
+            <a:extLst xmlns:a="http://schemas.openxmlformats.org/drawingml/2006/main">
+              <a:ext uri="{FF2B5EF4-FFF2-40B4-BE49-F238E27FC236}">
+                <a16:creationId xmlns:a16="http://schemas.microsoft.com/office/drawing/2014/main" id="{A897BE05-AC6F-4943-B8BA-A06E43BC10EC}"/>
               </a:ext>
             </a:extLst>
           </p:cNvPr>
@@ -4798,7 +4848,57 @@
         <p:spPr>
           <a:xfrm xmlns:a="http://schemas.openxmlformats.org/drawingml/2006/main">
             <a:off x="28089225" y="26174700"/>
-            <a:ext cx="13058775" cy="2190750"/>
+            <a:ext cx="13058775" cy="609600"/>
+          </a:xfrm>
+          <a:prstGeom xmlns:a="http://schemas.openxmlformats.org/drawingml/2006/main" prst="rect">
+            <a:avLst/>
+          </a:prstGeom>
+          <a:noFill xmlns:a="http://schemas.openxmlformats.org/drawingml/2006/main"/>
+          <a:ln xmlns:a="http://schemas.openxmlformats.org/drawingml/2006/main" w="0">
+            <a:noFill/>
+            <a:prstDash val="solid"/>
+          </a:ln>
+        </p:spPr>
+        <p:txBody>
+          <a:bodyPr xmlns:a="http://schemas.openxmlformats.org/drawingml/2006/main"/>
+          <a:lstStyle xmlns:a="http://schemas.openxmlformats.org/drawingml/2006/main"/>
+          <a:p xmlns:a="http://schemas.openxmlformats.org/drawingml/2006/main">
+            <a:pPr>
+              <a:defRPr sz="3000" b="1">
+                <a:solidFill>
+                  <a:srgbClr val="142A3B"/>
+                </a:solidFill>
+              </a:defRPr>
+            </a:pPr>
+            <a:r>
+              <a:rPr sz="3000" b="1">
+                <a:solidFill>
+                  <a:srgbClr val="142A3B"/>
+                </a:solidFill>
+              </a:rPr>
+              <a:t>A rights-safe methodological test fixture</a:t>
+            </a:r>
+          </a:p>
+        </p:txBody>
+      </p:sp>
+      <p:sp>
+        <p:nvSpPr>
+          <p:cNvPr id="85" name="conclusion">
+            <a:extLst xmlns:a="http://schemas.openxmlformats.org/drawingml/2006/main">
+              <a:ext uri="{FF2B5EF4-FFF2-40B4-BE49-F238E27FC236}">
+                <a16:creationId xmlns:a16="http://schemas.microsoft.com/office/drawing/2014/main" id="{42414983-965B-45D2-ADE9-5E8500D0C435}"/>
+              </a:ext>
+            </a:extLst>
+          </p:cNvPr>
+          <p:cNvSpPr>
+            <a:spLocks xmlns:a="http://schemas.openxmlformats.org/drawingml/2006/main" noGrp="1"/>
+          </p:cNvSpPr>
+          <p:nvPr/>
+        </p:nvSpPr>
+        <p:spPr>
+          <a:xfrm xmlns:a="http://schemas.openxmlformats.org/drawingml/2006/main">
+            <a:off x="28089225" y="26860500"/>
+            <a:ext cx="13058775" cy="1504950"/>
           </a:xfrm>
           <a:prstGeom xmlns:a="http://schemas.openxmlformats.org/drawingml/2006/main" prst="rect">
             <a:avLst/>
@@ -4826,17 +4926,34 @@
                   <a:srgbClr val="142A3B"/>
                 </a:solidFill>
               </a:rPr>
-              <a:t>AURORA-12 is a controlled, rights-safe fixture for testing evidence-linked scientific communication. It supports no inference about real biology, prognosis, treatment or clinical utility. Every number, cohort, feature, author and institution is fictional.</a:t>
-            </a:r>
-          </a:p>
-        </p:txBody>
-      </p:sp>
-      <p:sp>
-        <p:nvSpPr>
-          <p:cNvPr id="84" name="conclusion-evidence">
-            <a:extLst xmlns:a="http://schemas.openxmlformats.org/drawingml/2006/main">
-              <a:ext uri="{FF2B5EF4-FFF2-40B4-BE49-F238E27FC236}">
-                <a16:creationId xmlns:a16="http://schemas.microsoft.com/office/drawing/2014/main" id="{0D4C924E-9C39-4098-93EB-62E725847827}"/>
+              <a:t>• No biological, prognostic or clinical inference</a:t>
+            </a:r>
+          </a:p>
+          <a:p xmlns:a="http://schemas.openxmlformats.org/drawingml/2006/main">
+            <a:pPr>
+              <a:defRPr sz="2850">
+                <a:solidFill>
+                  <a:srgbClr val="142A3B"/>
+                </a:solidFill>
+              </a:defRPr>
+            </a:pPr>
+            <a:r>
+              <a:rPr sz="2850">
+                <a:solidFill>
+                  <a:srgbClr val="142A3B"/>
+                </a:solidFill>
+              </a:rPr>
+              <a:t>• All cohorts, values and identities are fictional</a:t>
+            </a:r>
+          </a:p>
+        </p:txBody>
+      </p:sp>
+      <p:sp>
+        <p:nvSpPr>
+          <p:cNvPr id="86" name="conclusion-evidence">
+            <a:extLst xmlns:a="http://schemas.openxmlformats.org/drawingml/2006/main">
+              <a:ext uri="{FF2B5EF4-FFF2-40B4-BE49-F238E27FC236}">
+                <a16:creationId xmlns:a16="http://schemas.microsoft.com/office/drawing/2014/main" id="{6E27DF87-56BB-46D7-9091-FBCBAE0C74F1}"/>
               </a:ext>
             </a:extLst>
           </p:cNvPr>
@@ -4864,14 +4981,14 @@
           <a:lstStyle xmlns:a="http://schemas.openxmlformats.org/drawingml/2006/main"/>
           <a:p xmlns:a="http://schemas.openxmlformats.org/drawingml/2006/main">
             <a:pPr>
-              <a:defRPr sz="1875" i="1">
+              <a:defRPr sz="1875">
                 <a:solidFill>
                   <a:srgbClr val="4D8FC0"/>
                 </a:solidFill>
               </a:defRPr>
             </a:pPr>
             <a:r>
-              <a:rPr sz="1875" i="1">
+              <a:rPr sz="1875">
                 <a:solidFill>
                   <a:srgbClr val="4D8FC0"/>
                 </a:solidFill>
@@ -4883,10 +5000,10 @@
       </p:sp>
       <p:sp>
         <p:nvSpPr>
-          <p:cNvPr id="85" name="footer-band">
-            <a:extLst xmlns:a="http://schemas.openxmlformats.org/drawingml/2006/main">
-              <a:ext uri="{FF2B5EF4-FFF2-40B4-BE49-F238E27FC236}">
-                <a16:creationId xmlns:a16="http://schemas.microsoft.com/office/drawing/2014/main" id="{7A68FCDB-3F48-427E-8E42-0A724814F7DE}"/>
+          <p:cNvPr id="87" name="footer-band">
+            <a:extLst xmlns:a="http://schemas.openxmlformats.org/drawingml/2006/main">
+              <a:ext uri="{FF2B5EF4-FFF2-40B4-BE49-F238E27FC236}">
+                <a16:creationId xmlns:a16="http://schemas.microsoft.com/office/drawing/2014/main" id="{6260E177-CE4E-4E3F-9142-28881802EF0C}"/>
               </a:ext>
             </a:extLst>
           </p:cNvPr>
@@ -4916,10 +5033,10 @@
       </p:sp>
       <p:sp>
         <p:nvSpPr>
-          <p:cNvPr id="86" name="footer-source">
-            <a:extLst xmlns:a="http://schemas.openxmlformats.org/drawingml/2006/main">
-              <a:ext uri="{FF2B5EF4-FFF2-40B4-BE49-F238E27FC236}">
-                <a16:creationId xmlns:a16="http://schemas.microsoft.com/office/drawing/2014/main" id="{9B1D2762-A09D-4832-B259-A3FD80E01D0D}"/>
+          <p:cNvPr id="88" name="footer-source">
+            <a:extLst xmlns:a="http://schemas.openxmlformats.org/drawingml/2006/main">
+              <a:ext uri="{FF2B5EF4-FFF2-40B4-BE49-F238E27FC236}">
+                <a16:creationId xmlns:a16="http://schemas.microsoft.com/office/drawing/2014/main" id="{1B1F4DC6-4B0F-44AE-890D-3112410B66B7}"/>
               </a:ext>
             </a:extLst>
           </p:cNvPr>
@@ -4931,7 +5048,7 @@
         <p:spPr>
           <a:xfrm xmlns:a="http://schemas.openxmlformats.org/drawingml/2006/main">
             <a:off x="1333500" y="29594175"/>
-            <a:ext cx="28575000" cy="400050"/>
+            <a:ext cx="28194000" cy="400050"/>
           </a:xfrm>
           <a:prstGeom xmlns:a="http://schemas.openxmlformats.org/drawingml/2006/main" prst="rect">
             <a:avLst/>
@@ -4966,10 +5083,10 @@
       </p:sp>
       <p:sp>
         <p:nvSpPr>
-          <p:cNvPr id="87" name="footer-status">
-            <a:extLst xmlns:a="http://schemas.openxmlformats.org/drawingml/2006/main">
-              <a:ext uri="{FF2B5EF4-FFF2-40B4-BE49-F238E27FC236}">
-                <a16:creationId xmlns:a16="http://schemas.microsoft.com/office/drawing/2014/main" id="{545235E4-BDCA-453F-A0E6-0FC51545C2DB}"/>
+          <p:cNvPr id="89" name="footer-status">
+            <a:extLst xmlns:a="http://schemas.openxmlformats.org/drawingml/2006/main">
+              <a:ext uri="{FF2B5EF4-FFF2-40B4-BE49-F238E27FC236}">
+                <a16:creationId xmlns:a16="http://schemas.microsoft.com/office/drawing/2014/main" id="{3CFD2303-763D-489D-8C5A-E52811E14F68}"/>
               </a:ext>
             </a:extLst>
           </p:cNvPr>
@@ -5017,7 +5134,7 @@
     </p:spTree>
     <p:extLst>
       <p:ext uri="{BB962C8B-B14F-4D97-AF65-F5344CB8AC3E}">
-        <p14:creationId xmlns:p14="http://schemas.microsoft.com/office/powerpoint/2010/main" val="1184628703"/>
+        <p14:creationId xmlns:p14="http://schemas.microsoft.com/office/powerpoint/2010/main" val="1006826926"/>
       </p:ext>
     </p:extLst>
   </p:cSld>
